--- a/docs/닥터그린_수업_슬라이드.pptx
+++ b/docs/닥터그린_수업_슬라이드.pptx
@@ -37,6 +37,7 @@
     <p:sldId id="283" r:id="rId34"/>
     <p:sldId id="284" r:id="rId35"/>
     <p:sldId id="277" r:id="rId23"/>
+    <p:sldId id="288" r:id="rId39"/>
     <p:sldId id="287" r:id="rId38"/>
     <p:sldId id="278" r:id="rId24"/>
     <p:sldId id="279" r:id="rId25"/>
@@ -1789,6 +1790,93 @@
     <p:extLst>
       <p:ext uri="{BB962C8B-B14F-4D97-AF65-F5344CB8AC3E}">
         <p14:creationId xmlns:p14="http://schemas.microsoft.com/office/powerpoint/2010/main" val="1024086992"/>
+      </p:ext>
+    </p:extLst>
+  </p:cSld>
+  <p:clrMapOvr>
+    <a:masterClrMapping/>
+  </p:clrMapOvr>
+</p:notes>
+</file>
+
+<file path=ppt/notesSlides/notesSlide26.xml><?xml version="1.0" encoding="utf-8"?>
+<p:notes xmlns:a="http://schemas.openxmlformats.org/drawingml/2006/main" xmlns:r="http://schemas.openxmlformats.org/officeDocument/2006/relationships" xmlns:p="http://schemas.openxmlformats.org/presentationml/2006/main">
+  <p:cSld>
+    <p:spTree>
+      <p:nvGrpSpPr>
+        <p:cNvPr id="1" name=""/>
+        <p:cNvGrpSpPr/>
+        <p:nvPr/>
+      </p:nvGrpSpPr>
+      <p:grpSpPr>
+        <a:xfrm>
+          <a:off x="0" y="0"/>
+          <a:ext cx="0" cy="0"/>
+          <a:chOff x="0" y="0"/>
+          <a:chExt cx="0" cy="0"/>
+        </a:xfrm>
+      </p:grpSpPr>
+      <p:sp>
+        <p:nvSpPr>
+          <p:cNvPr id="2" name="Slide Image Placeholder 1"/>
+          <p:cNvSpPr>
+            <a:spLocks noGrp="1" noRot="1" noChangeAspect="1"/>
+          </p:cNvSpPr>
+          <p:nvPr>
+            <p:ph type="sldImg"/>
+          </p:nvPr>
+        </p:nvSpPr>
+        <p:spPr/>
+      </p:sp>
+      <p:sp>
+        <p:nvSpPr>
+          <p:cNvPr id="3" name="Notes Placeholder 2"/>
+          <p:cNvSpPr>
+            <a:spLocks noGrp="1"/>
+          </p:cNvSpPr>
+          <p:nvPr>
+            <p:ph type="body" idx="1"/>
+          </p:nvPr>
+        </p:nvSpPr>
+        <p:spPr/>
+        <p:txBody>
+          <a:bodyPr/>
+          <a:lstStyle/>
+          <a:p>
+            <a:r>
+              <a:rPr lang="en-US" dirty="0"/>
+              <a:t>학생이 중간에 눈치챘더라도 여기서 공개 — ‘보안 원칙을 지키기 위한 설계’로 뒤집는 것이 포인트.</a:t>
+            </a:r>
+          </a:p>
+        </p:txBody>
+      </p:sp>
+      <p:sp>
+        <p:nvSpPr>
+          <p:cNvPr id="4" name="Slide Number Placeholder 3"/>
+          <p:cNvSpPr>
+            <a:spLocks noGrp="1"/>
+          </p:cNvSpPr>
+          <p:nvPr>
+            <p:ph type="sldNum" sz="quarter" idx="10"/>
+          </p:nvPr>
+        </p:nvSpPr>
+        <p:spPr/>
+        <p:txBody>
+          <a:bodyPr/>
+          <a:lstStyle/>
+          <a:p>
+            <a:fld id="{F7021451-1387-4CA6-816F-3879F97B5CBC}" type="slidenum">
+              <a:rPr lang="en-US"/>
+              <a:t>1</a:t>
+            </a:fld>
+            <a:endParaRPr lang="en-US"/>
+          </a:p>
+        </p:txBody>
+      </p:sp>
+    </p:spTree>
+    <p:extLst>
+      <p:ext uri="{BB962C8B-B14F-4D97-AF65-F5344CB8AC3E}">
+        <p14:creationId xmlns:p14="http://schemas.microsoft.com/office/powerpoint/2010/main" val="1024086991"/>
       </p:ext>
     </p:extLst>
   </p:cSld>
@@ -7522,7 +7610,7 @@
                 <a:ea typeface="Paperlogy" pitchFamily="34" charset="-122"/>
                 <a:cs typeface="Paperlogy" pitchFamily="34" charset="-120"/>
               </a:rPr>
-              <a:t>단, 무한정 반복해도 계속 오르지는 않습니다 (수확체감 · 과적합 주의)</a:t>
+              <a:t>단, 무한정 반복하면? 어느 순간 정확도는 멈추고(수확체감), 처음 보는 사진에는 오히려 약해집니다(과적합)</a:t>
             </a:r>
             <a:endParaRPr lang="en-US" sz="950" dirty="0"/>
           </a:p>
@@ -8204,7 +8292,7 @@
                 <a:ea typeface="Paperlogy" pitchFamily="34" charset="-122"/>
                 <a:cs typeface="Paperlogy" pitchFamily="34" charset="-120"/>
               </a:rPr>
-              <a:t>실제 앱은 신뢰도 75% 미만이면 판단을 보류합니다 — 좋은 AI는 모를 때 ‘모른다’고 말해요!</a:t>
+              <a:t>신뢰도 75% 미만이면 화면에 진짜로 ‘판단보류’가 떠요 — 직접 만들어 보세요! 좋은 AI는 모를 때 ‘모른다’고 말합니다</a:t>
             </a:r>
             <a:endParaRPr lang="en-US" sz="1300" dirty="0"/>
           </a:p>
@@ -9166,7 +9254,7 @@
                 <a:ea typeface="Paperlogy" pitchFamily="34" charset="-122"/>
                 <a:cs typeface="Paperlogy" pitchFamily="34" charset="-120"/>
               </a:rPr>
-              <a:t>(손가락만 한 소형 컴퓨터)가 온도·습도를 재서 </a:t>
+              <a:t>(손가락만 한 소형 컴퓨터)가 온도·습도·토양수분을 재서 </a:t>
             </a:r>
             <a:r>
               <a:rPr lang="en-US" sz="1400" b="1" dirty="0">
@@ -9515,7 +9603,7 @@
                 <a:ea typeface="Paperlogy" pitchFamily="34" charset="-122"/>
                 <a:cs typeface="Paperlogy" pitchFamily="34" charset="-120"/>
               </a:rPr>
-              <a:t>온도·습도 슬라이더로 값 설정</a:t>
+              <a:t>온도·습도·토양수분 슬라이더로 값 설정</a:t>
             </a:r>
             <a:endParaRPr lang="en-US" sz="1200" dirty="0"/>
           </a:p>
@@ -9572,18 +9660,7 @@
                 <a:ea typeface="Paperlogy" pitchFamily="34" charset="-122"/>
                 <a:cs typeface="Paperlogy" pitchFamily="34" charset="-120"/>
               </a:rPr>
-              <a:t> (이 순간 연결 완료)</a:t>
-            </a:r>
-            <a:r>
-              <a:rPr lang="en-US" sz="1200" dirty="0">
-                <a:solidFill>
-                  <a:srgbClr val="1E2B22"/>
-                </a:solidFill>
-                <a:latin typeface="Paperlogy" pitchFamily="34" charset="0"/>
-                <a:ea typeface="Paperlogy" pitchFamily="34" charset="-122"/>
-                <a:cs typeface="Paperlogy" pitchFamily="34" charset="-120"/>
-              </a:rPr>
-              <a:t>→ 데이터가 센서에서 DB로 이동</a:t>
+              <a:t>→ 데이터가 DB로 이동 (연결 완료)</a:t>
             </a:r>
             <a:endParaRPr lang="en-US" sz="1200" dirty="0"/>
           </a:p>
@@ -9640,7 +9717,7 @@
                 <a:ea typeface="Paperlogy" pitchFamily="34" charset="-122"/>
                 <a:cs typeface="Paperlogy" pitchFamily="34" charset="-120"/>
               </a:rPr>
-              <a:t>→ 1.5초마다 자동 전송, </a:t>
+              <a:t>→ 1.5초마다 전송, </a:t>
             </a:r>
             <a:r>
               <a:rPr lang="en-US" sz="1200" dirty="0" err="1">
@@ -9687,6 +9764,30 @@
                 <a:cs typeface="Paperlogy" pitchFamily="34" charset="-120"/>
               </a:rPr>
               <a:t>“입김 불기(습도 상승)” → 습도가 확 뛰며 산봉우리</a:t>
+            </a:r>
+            <a:endParaRPr lang="en-US" sz="1200" dirty="0"/>
+          </a:p>
+          <a:p>
+            <a:pPr marL="342900" indent="-342900">
+              <a:lnSpc>
+                <a:spcPct val="95000"/>
+              </a:lnSpc>
+              <a:spcAft>
+                <a:spcPts val="500"/>
+              </a:spcAft>
+              <a:buSzPct val="100000"/>
+              <a:buChar char="•"/>
+            </a:pPr>
+            <a:r>
+              <a:rPr lang="en-US" sz="1200" dirty="0">
+                <a:solidFill>
+                  <a:srgbClr val="1E2B22"/>
+                </a:solidFill>
+                <a:latin typeface="Paperlogy" pitchFamily="34" charset="0"/>
+                <a:ea typeface="Paperlogy" pitchFamily="34" charset="-122"/>
+                <a:cs typeface="Paperlogy" pitchFamily="34" charset="-120"/>
+              </a:rPr>
+              <a:t>“물 주기(토양수분 ↑)” → 토양수분이 확 올라감</a:t>
             </a:r>
             <a:endParaRPr lang="en-US" sz="1200" dirty="0"/>
           </a:p>
@@ -16871,7 +16972,7 @@
                 <a:ea typeface="Paperlogy" pitchFamily="34" charset="-122"/>
                 <a:cs typeface="Paperlogy" pitchFamily="34" charset="-120"/>
               </a:rPr>
-              <a:t>31</a:t>
+              <a:t>32</a:t>
             </a:r>
             <a:endParaRPr lang="en-US" sz="900" dirty="0"/>
           </a:p>
@@ -22162,7 +22263,7 @@
                 <a:ea typeface="Paperlogy" pitchFamily="34" charset="-122"/>
                 <a:cs typeface="Paperlogy" pitchFamily="34" charset="-120"/>
               </a:rPr>
-              <a:t>예) “토양수분이 30% 아래로 내려가면 → 물을 준다” — 왜 그 조건에 그 행동인지 근거까지 설명해보세요</a:t>
+              <a:t>예) “토양수분이 40% 아래로 내려가면 → 물을 준다” — 왜 그 조건에 그 행동인지 근거까지 설명해보세요</a:t>
             </a:r>
             <a:endParaRPr lang="en-US" sz="1300" dirty="0"/>
           </a:p>
@@ -22759,6 +22860,789 @@
                 <a:cs typeface="Paperlogy" pitchFamily="34" charset="-120"/>
               </a:rPr>
               <a:t>2~3명 발표</a:t>
+            </a:r>
+            <a:endParaRPr lang="en-US" sz="1600" dirty="0"/>
+          </a:p>
+        </p:txBody>
+      </p:sp>
+      <p:sp>
+        <p:nvSpPr>
+          <p:cNvPr id="19" name="Text 17"/>
+          <p:cNvSpPr/>
+          <p:nvPr/>
+        </p:nvSpPr>
+        <p:spPr>
+          <a:xfrm>
+            <a:off x="594360" y="4828032"/>
+            <a:ext cx="4572000" cy="219456"/>
+          </a:xfrm>
+          <a:prstGeom prst="rect">
+            <a:avLst/>
+          </a:prstGeom>
+          <a:noFill/>
+          <a:ln/>
+        </p:spPr>
+        <p:txBody>
+          <a:bodyPr wrap="square" lIns="0" tIns="0" rIns="0" bIns="0" rtlCol="0" anchor="ctr"/>
+          <a:lstStyle/>
+          <a:p>
+            <a:pPr marL="0" indent="0" algn="l">
+              <a:buNone/>
+            </a:pPr>
+            <a:r>
+              <a:rPr lang="en-US" sz="900" dirty="0">
+                <a:solidFill>
+                  <a:srgbClr val="5B6B60"/>
+                </a:solidFill>
+                <a:latin typeface="Paperlogy" pitchFamily="34" charset="0"/>
+                <a:ea typeface="Paperlogy" pitchFamily="34" charset="-122"/>
+                <a:cs typeface="Paperlogy" pitchFamily="34" charset="-120"/>
+              </a:rPr>
+              <a:t> 스마트팜 가상 실습실</a:t>
+            </a:r>
+            <a:endParaRPr lang="en-US" sz="900" dirty="0"/>
+          </a:p>
+        </p:txBody>
+      </p:sp>
+      <p:sp>
+        <p:nvSpPr>
+          <p:cNvPr id="20" name="Text 18"/>
+          <p:cNvSpPr/>
+          <p:nvPr/>
+        </p:nvSpPr>
+        <p:spPr>
+          <a:xfrm>
+            <a:off x="7726680" y="4828032"/>
+            <a:ext cx="822960" cy="219456"/>
+          </a:xfrm>
+          <a:prstGeom prst="rect">
+            <a:avLst/>
+          </a:prstGeom>
+          <a:noFill/>
+          <a:ln/>
+        </p:spPr>
+        <p:txBody>
+          <a:bodyPr wrap="square" lIns="0" tIns="0" rIns="0" bIns="0" rtlCol="0" anchor="ctr"/>
+          <a:lstStyle/>
+          <a:p>
+            <a:pPr marL="0" indent="0" algn="r">
+              <a:buNone/>
+            </a:pPr>
+            <a:r>
+              <a:rPr lang="en-US" sz="900" dirty="0">
+                <a:solidFill>
+                  <a:srgbClr val="5B6B60"/>
+                </a:solidFill>
+                <a:latin typeface="Paperlogy" pitchFamily="34" charset="0"/>
+                <a:ea typeface="Paperlogy" pitchFamily="34" charset="-122"/>
+                <a:cs typeface="Paperlogy" pitchFamily="34" charset="-120"/>
+              </a:rPr>
+              <a:t>31</a:t>
+            </a:r>
+            <a:endParaRPr lang="en-US" sz="900" dirty="0"/>
+          </a:p>
+        </p:txBody>
+      </p:sp>
+      <p:pic>
+        <p:nvPicPr>
+          <p:cNvPr id="21" name="Picture 20">
+            <a:extLst>
+              <a:ext uri="{FF2B5EF4-FFF2-40B4-BE49-F238E27FC236}">
+                <a16:creationId xmlns:a16="http://schemas.microsoft.com/office/drawing/2014/main" id="{098590E6-ABB7-C7D1-8BC4-158883304520}"/>
+              </a:ext>
+            </a:extLst>
+          </p:cNvPr>
+          <p:cNvPicPr>
+            <a:picLocks noChangeAspect="1"/>
+          </p:cNvPicPr>
+          <p:nvPr/>
+        </p:nvPicPr>
+        <p:blipFill>
+          <a:blip r:embed="rId3">
+            <a:duotone>
+              <a:prstClr val="black"/>
+              <a:srgbClr val="264710">
+                <a:tint val="45000"/>
+                <a:satMod val="400000"/>
+              </a:srgbClr>
+            </a:duotone>
+            <a:extLst>
+              <a:ext uri="{BEBA8EAE-BF5A-486C-A8C5-ECC9F3942E4B}">
+                <a14:imgProps xmlns:a14="http://schemas.microsoft.com/office/drawing/2010/main">
+                  <a14:imgLayer r:embed="rId4">
+                    <a14:imgEffect>
+                      <a14:colorTemperature colorTemp="11500"/>
+                    </a14:imgEffect>
+                    <a14:imgEffect>
+                      <a14:saturation sat="28000"/>
+                    </a14:imgEffect>
+                  </a14:imgLayer>
+                </a14:imgProps>
+              </a:ext>
+            </a:extLst>
+          </a:blip>
+          <a:stretch>
+            <a:fillRect/>
+          </a:stretch>
+        </p:blipFill>
+        <p:spPr>
+          <a:xfrm>
+            <a:off x="4257402" y="4745119"/>
+            <a:ext cx="629195" cy="367030"/>
+          </a:xfrm>
+          <a:prstGeom prst="rect">
+            <a:avLst/>
+          </a:prstGeom>
+          <a:solidFill>
+            <a:schemeClr val="accent6">
+              <a:lumMod val="50000"/>
+              <a:alpha val="0"/>
+            </a:schemeClr>
+          </a:solidFill>
+        </p:spPr>
+      </p:pic>
+    </p:spTree>
+  </p:cSld>
+  <p:clrMapOvr>
+    <a:masterClrMapping/>
+  </p:clrMapOvr>
+</p:sld>
+</file>
+
+<file path=ppt/slides/slide33.xml><?xml version="1.0" encoding="utf-8"?>
+<p:sld xmlns:a="http://schemas.openxmlformats.org/drawingml/2006/main" xmlns:r="http://schemas.openxmlformats.org/officeDocument/2006/relationships" xmlns:p="http://schemas.openxmlformats.org/presentationml/2006/main">
+  <p:cSld name="Slide 10">
+    <p:bg>
+      <p:bgPr>
+        <a:solidFill>
+          <a:srgbClr val="FFFFFF"/>
+        </a:solidFill>
+        <a:effectLst/>
+      </p:bgPr>
+    </p:bg>
+    <p:spTree>
+      <p:nvGrpSpPr>
+        <p:cNvPr id="1" name=""/>
+        <p:cNvGrpSpPr/>
+        <p:nvPr/>
+      </p:nvGrpSpPr>
+      <p:grpSpPr>
+        <a:xfrm>
+          <a:off x="0" y="0"/>
+          <a:ext cx="0" cy="0"/>
+          <a:chOff x="0" y="0"/>
+          <a:chExt cx="0" cy="0"/>
+        </a:xfrm>
+      </p:grpSpPr>
+      <p:sp>
+        <p:nvSpPr>
+          <p:cNvPr id="2" name="Shape 0"/>
+          <p:cNvSpPr/>
+          <p:nvPr/>
+        </p:nvSpPr>
+        <p:spPr>
+          <a:xfrm>
+            <a:off x="594360" y="429768"/>
+            <a:ext cx="91440" cy="457200"/>
+          </a:xfrm>
+          <a:prstGeom prst="roundRect">
+            <a:avLst>
+              <a:gd name="adj" fmla="val 50000"/>
+            </a:avLst>
+          </a:prstGeom>
+          <a:solidFill>
+            <a:srgbClr val="2E7D32"/>
+          </a:solidFill>
+          <a:ln/>
+        </p:spPr>
+        <p:txBody>
+          <a:bodyPr/>
+          <a:lstStyle/>
+          <a:p>
+            <a:endParaRPr lang="en-KR"/>
+          </a:p>
+        </p:txBody>
+      </p:sp>
+      <p:sp>
+        <p:nvSpPr>
+          <p:cNvPr id="3" name="Text 1"/>
+          <p:cNvSpPr/>
+          <p:nvPr/>
+        </p:nvSpPr>
+        <p:spPr>
+          <a:xfrm>
+            <a:off x="832104" y="384048"/>
+            <a:ext cx="7717536" cy="548640"/>
+          </a:xfrm>
+          <a:prstGeom prst="rect">
+            <a:avLst/>
+          </a:prstGeom>
+          <a:noFill/>
+          <a:ln/>
+        </p:spPr>
+        <p:txBody>
+          <a:bodyPr wrap="square" lIns="0" tIns="0" rIns="0" bIns="0" rtlCol="0" anchor="ctr"/>
+          <a:lstStyle/>
+          <a:p>
+            <a:pPr marL="0" indent="0" algn="l">
+              <a:buNone/>
+            </a:pPr>
+            <a:r>
+              <a:rPr lang="en-US" sz="2800" b="1" dirty="0">
+                <a:solidFill>
+                  <a:srgbClr val="1B5E20"/>
+                </a:solidFill>
+                <a:latin typeface="Paperlogy" pitchFamily="34" charset="0"/>
+                <a:ea typeface="Paperlogy" pitchFamily="34" charset="-122"/>
+                <a:cs typeface="Paperlogy" pitchFamily="34" charset="-120"/>
+              </a:rPr>
+              <a:t>오늘의 비밀 공개 🔓</a:t>
+            </a:r>
+            <a:endParaRPr lang="en-US" sz="2800" dirty="0"/>
+          </a:p>
+        </p:txBody>
+      </p:sp>
+      <p:sp>
+        <p:nvSpPr>
+          <p:cNvPr id="4" name="Shape 2"/>
+          <p:cNvSpPr/>
+          <p:nvPr/>
+        </p:nvSpPr>
+        <p:spPr>
+          <a:xfrm>
+            <a:off x="594360" y="1417320"/>
+            <a:ext cx="7955280" cy="896112"/>
+          </a:xfrm>
+          <a:prstGeom prst="roundRect">
+            <a:avLst>
+              <a:gd name="adj" fmla="val 8163"/>
+            </a:avLst>
+          </a:prstGeom>
+          <a:solidFill>
+            <a:srgbClr val="F1F8F2"/>
+          </a:solidFill>
+          <a:ln w="12700">
+            <a:solidFill>
+              <a:srgbClr val="D8E8DC"/>
+            </a:solidFill>
+            <a:prstDash val="solid"/>
+          </a:ln>
+          <a:effectLst>
+            <a:outerShdw blurRad="88900" dist="38100" dir="5400000" algn="bl" rotWithShape="0">
+              <a:srgbClr val="1B5E20">
+                <a:alpha val="12000"/>
+              </a:srgbClr>
+            </a:outerShdw>
+          </a:effectLst>
+        </p:spPr>
+        <p:txBody>
+          <a:bodyPr/>
+          <a:lstStyle/>
+          <a:p>
+            <a:endParaRPr lang="en-KR"/>
+          </a:p>
+        </p:txBody>
+      </p:sp>
+      <p:sp>
+        <p:nvSpPr>
+          <p:cNvPr id="5" name="Shape 3"/>
+          <p:cNvSpPr/>
+          <p:nvPr/>
+        </p:nvSpPr>
+        <p:spPr>
+          <a:xfrm>
+            <a:off x="868680" y="1636776"/>
+            <a:ext cx="457200" cy="457200"/>
+          </a:xfrm>
+          <a:prstGeom prst="ellipse">
+            <a:avLst/>
+          </a:prstGeom>
+          <a:solidFill>
+            <a:srgbClr val="66BB6A"/>
+          </a:solidFill>
+          <a:ln/>
+        </p:spPr>
+        <p:txBody>
+          <a:bodyPr/>
+          <a:lstStyle/>
+          <a:p>
+            <a:endParaRPr lang="en-KR"/>
+          </a:p>
+        </p:txBody>
+      </p:sp>
+      <p:sp>
+        <p:nvSpPr>
+          <p:cNvPr id="6" name="Shape 4"/>
+          <p:cNvSpPr/>
+          <p:nvPr/>
+        </p:nvSpPr>
+        <p:spPr>
+          <a:xfrm>
+            <a:off x="978408" y="1874520"/>
+            <a:ext cx="86868" cy="82296"/>
+          </a:xfrm>
+          <a:prstGeom prst="line">
+            <a:avLst/>
+          </a:prstGeom>
+          <a:noFill/>
+          <a:ln w="27940">
+            <a:solidFill>
+              <a:srgbClr val="FFFFFF"/>
+            </a:solidFill>
+            <a:prstDash val="solid"/>
+          </a:ln>
+        </p:spPr>
+        <p:txBody>
+          <a:bodyPr/>
+          <a:lstStyle/>
+          <a:p>
+            <a:endParaRPr lang="en-KR"/>
+          </a:p>
+        </p:txBody>
+      </p:sp>
+      <p:sp>
+        <p:nvSpPr>
+          <p:cNvPr id="7" name="Shape 5"/>
+          <p:cNvSpPr/>
+          <p:nvPr/>
+        </p:nvSpPr>
+        <p:spPr>
+          <a:xfrm flipV="1">
+            <a:off x="1065276" y="1787652"/>
+            <a:ext cx="160020" cy="169164"/>
+          </a:xfrm>
+          <a:prstGeom prst="line">
+            <a:avLst/>
+          </a:prstGeom>
+          <a:noFill/>
+          <a:ln w="27940">
+            <a:solidFill>
+              <a:srgbClr val="FFFFFF"/>
+            </a:solidFill>
+            <a:prstDash val="solid"/>
+          </a:ln>
+        </p:spPr>
+        <p:txBody>
+          <a:bodyPr/>
+          <a:lstStyle/>
+          <a:p>
+            <a:endParaRPr lang="en-KR"/>
+          </a:p>
+        </p:txBody>
+      </p:sp>
+      <p:sp>
+        <p:nvSpPr>
+          <p:cNvPr id="8" name="Text 6"/>
+          <p:cNvSpPr/>
+          <p:nvPr/>
+        </p:nvSpPr>
+        <p:spPr>
+          <a:xfrm>
+            <a:off x="1554480" y="1417320"/>
+            <a:ext cx="6720840" cy="896112"/>
+          </a:xfrm>
+          <a:prstGeom prst="rect">
+            <a:avLst/>
+          </a:prstGeom>
+          <a:noFill/>
+          <a:ln/>
+        </p:spPr>
+        <p:txBody>
+          <a:bodyPr wrap="square" lIns="0" tIns="0" rIns="0" bIns="0" rtlCol="0" anchor="ctr"/>
+          <a:lstStyle/>
+          <a:p>
+            <a:pPr marL="0" indent="0">
+              <a:lnSpc>
+                <a:spcPct val="110000"/>
+              </a:lnSpc>
+              <a:buNone/>
+            </a:pPr>
+            <a:r>
+              <a:rPr lang="en-US" sz="1600" b="1" dirty="0">
+                <a:solidFill>
+                  <a:srgbClr val="1B5E20"/>
+                </a:solidFill>
+                <a:latin typeface="Paperlogy" pitchFamily="34" charset="0"/>
+                <a:ea typeface="Paperlogy" pitchFamily="34" charset="-122"/>
+                <a:cs typeface="Paperlogy" pitchFamily="34" charset="-120"/>
+              </a:rPr>
+              <a:t>사실, 여러분이 붙여넣은 인증키는 문을 여는 ‘스위치’였습니다
+</a:t>
+            </a:r>
+            <a:r>
+              <a:rPr lang="en-US" sz="1300" dirty="0">
+                <a:solidFill>
+                  <a:srgbClr val="5B6B60"/>
+                </a:solidFill>
+                <a:latin typeface="Paperlogy" pitchFamily="34" charset="0"/>
+                <a:ea typeface="Paperlogy" pitchFamily="34" charset="-122"/>
+                <a:cs typeface="Paperlogy" pitchFamily="34" charset="-120"/>
+              </a:rPr>
+              <a:t>진짜 기상청 호출은 서버에 숨겨둔 키가 했어요</a:t>
+            </a:r>
+            <a:endParaRPr lang="en-US" sz="1600" dirty="0"/>
+          </a:p>
+        </p:txBody>
+      </p:sp>
+      <p:sp>
+        <p:nvSpPr>
+          <p:cNvPr id="9" name="Shape 7"/>
+          <p:cNvSpPr/>
+          <p:nvPr/>
+        </p:nvSpPr>
+        <p:spPr>
+          <a:xfrm>
+            <a:off x="594360" y="2459736"/>
+            <a:ext cx="7955280" cy="896112"/>
+          </a:xfrm>
+          <a:prstGeom prst="roundRect">
+            <a:avLst>
+              <a:gd name="adj" fmla="val 8163"/>
+            </a:avLst>
+          </a:prstGeom>
+          <a:solidFill>
+            <a:srgbClr val="F1F8F2"/>
+          </a:solidFill>
+          <a:ln w="12700">
+            <a:solidFill>
+              <a:srgbClr val="D8E8DC"/>
+            </a:solidFill>
+            <a:prstDash val="solid"/>
+          </a:ln>
+          <a:effectLst>
+            <a:outerShdw blurRad="88900" dist="38100" dir="5400000" algn="bl" rotWithShape="0">
+              <a:srgbClr val="1B5E20">
+                <a:alpha val="12000"/>
+              </a:srgbClr>
+            </a:outerShdw>
+          </a:effectLst>
+        </p:spPr>
+        <p:txBody>
+          <a:bodyPr/>
+          <a:lstStyle/>
+          <a:p>
+            <a:endParaRPr lang="en-KR"/>
+          </a:p>
+        </p:txBody>
+      </p:sp>
+      <p:sp>
+        <p:nvSpPr>
+          <p:cNvPr id="10" name="Shape 8"/>
+          <p:cNvSpPr/>
+          <p:nvPr/>
+        </p:nvSpPr>
+        <p:spPr>
+          <a:xfrm>
+            <a:off x="868680" y="2679192"/>
+            <a:ext cx="457200" cy="457200"/>
+          </a:xfrm>
+          <a:prstGeom prst="ellipse">
+            <a:avLst/>
+          </a:prstGeom>
+          <a:solidFill>
+            <a:srgbClr val="66BB6A"/>
+          </a:solidFill>
+          <a:ln/>
+        </p:spPr>
+        <p:txBody>
+          <a:bodyPr/>
+          <a:lstStyle/>
+          <a:p>
+            <a:endParaRPr lang="en-KR"/>
+          </a:p>
+        </p:txBody>
+      </p:sp>
+      <p:sp>
+        <p:nvSpPr>
+          <p:cNvPr id="11" name="Shape 9"/>
+          <p:cNvSpPr/>
+          <p:nvPr/>
+        </p:nvSpPr>
+        <p:spPr>
+          <a:xfrm>
+            <a:off x="978408" y="2916936"/>
+            <a:ext cx="86868" cy="82296"/>
+          </a:xfrm>
+          <a:prstGeom prst="line">
+            <a:avLst/>
+          </a:prstGeom>
+          <a:noFill/>
+          <a:ln w="27940">
+            <a:solidFill>
+              <a:srgbClr val="FFFFFF"/>
+            </a:solidFill>
+            <a:prstDash val="solid"/>
+          </a:ln>
+        </p:spPr>
+        <p:txBody>
+          <a:bodyPr/>
+          <a:lstStyle/>
+          <a:p>
+            <a:endParaRPr lang="en-KR"/>
+          </a:p>
+        </p:txBody>
+      </p:sp>
+      <p:sp>
+        <p:nvSpPr>
+          <p:cNvPr id="12" name="Shape 10"/>
+          <p:cNvSpPr/>
+          <p:nvPr/>
+        </p:nvSpPr>
+        <p:spPr>
+          <a:xfrm flipV="1">
+            <a:off x="1065276" y="2830068"/>
+            <a:ext cx="160020" cy="169164"/>
+          </a:xfrm>
+          <a:prstGeom prst="line">
+            <a:avLst/>
+          </a:prstGeom>
+          <a:noFill/>
+          <a:ln w="27940">
+            <a:solidFill>
+              <a:srgbClr val="FFFFFF"/>
+            </a:solidFill>
+            <a:prstDash val="solid"/>
+          </a:ln>
+        </p:spPr>
+        <p:txBody>
+          <a:bodyPr/>
+          <a:lstStyle/>
+          <a:p>
+            <a:endParaRPr lang="en-KR"/>
+          </a:p>
+        </p:txBody>
+      </p:sp>
+      <p:sp>
+        <p:nvSpPr>
+          <p:cNvPr id="13" name="Text 11"/>
+          <p:cNvSpPr/>
+          <p:nvPr/>
+        </p:nvSpPr>
+        <p:spPr>
+          <a:xfrm>
+            <a:off x="1554480" y="2459736"/>
+            <a:ext cx="6720840" cy="896112"/>
+          </a:xfrm>
+          <a:prstGeom prst="rect">
+            <a:avLst/>
+          </a:prstGeom>
+          <a:noFill/>
+          <a:ln/>
+        </p:spPr>
+        <p:txBody>
+          <a:bodyPr wrap="square" lIns="0" tIns="0" rIns="0" bIns="0" rtlCol="0" anchor="ctr"/>
+          <a:lstStyle/>
+          <a:p>
+            <a:pPr marL="0" indent="0">
+              <a:lnSpc>
+                <a:spcPct val="110000"/>
+              </a:lnSpc>
+              <a:buNone/>
+            </a:pPr>
+            <a:r>
+              <a:rPr lang="en-US" sz="1600" b="1" dirty="0">
+                <a:solidFill>
+                  <a:srgbClr val="1B5E20"/>
+                </a:solidFill>
+                <a:latin typeface="Paperlogy" pitchFamily="34" charset="0"/>
+                <a:ea typeface="Paperlogy" pitchFamily="34" charset="-122"/>
+                <a:cs typeface="Paperlogy" pitchFamily="34" charset="-120"/>
+              </a:rPr>
+              <a:t>왜 진짜 키를 나눠주지 않았을까?
+</a:t>
+            </a:r>
+            <a:r>
+              <a:rPr lang="en-US" sz="1300" dirty="0">
+                <a:solidFill>
+                  <a:srgbClr val="5B6B60"/>
+                </a:solidFill>
+                <a:latin typeface="Paperlogy" pitchFamily="34" charset="0"/>
+                <a:ea typeface="Paperlogy" pitchFamily="34" charset="-122"/>
+                <a:cs typeface="Paperlogy" pitchFamily="34" charset="-120"/>
+              </a:rPr>
+              <a:t>나눠주는 순간이 곧 ‘키 유출’이기 때문</a:t>
+            </a:r>
+            <a:endParaRPr lang="en-US" sz="1600" dirty="0"/>
+          </a:p>
+        </p:txBody>
+      </p:sp>
+      <p:sp>
+        <p:nvSpPr>
+          <p:cNvPr id="14" name="Shape 12"/>
+          <p:cNvSpPr/>
+          <p:nvPr/>
+        </p:nvSpPr>
+        <p:spPr>
+          <a:xfrm>
+            <a:off x="594360" y="3502152"/>
+            <a:ext cx="7955280" cy="896112"/>
+          </a:xfrm>
+          <a:prstGeom prst="roundRect">
+            <a:avLst>
+              <a:gd name="adj" fmla="val 8163"/>
+            </a:avLst>
+          </a:prstGeom>
+          <a:solidFill>
+            <a:srgbClr val="F1F8F2"/>
+          </a:solidFill>
+          <a:ln w="12700">
+            <a:solidFill>
+              <a:srgbClr val="D8E8DC"/>
+            </a:solidFill>
+            <a:prstDash val="solid"/>
+          </a:ln>
+          <a:effectLst>
+            <a:outerShdw blurRad="88900" dist="38100" dir="5400000" algn="bl" rotWithShape="0">
+              <a:srgbClr val="1B5E20">
+                <a:alpha val="12000"/>
+              </a:srgbClr>
+            </a:outerShdw>
+          </a:effectLst>
+        </p:spPr>
+        <p:txBody>
+          <a:bodyPr/>
+          <a:lstStyle/>
+          <a:p>
+            <a:endParaRPr lang="en-KR"/>
+          </a:p>
+        </p:txBody>
+      </p:sp>
+      <p:sp>
+        <p:nvSpPr>
+          <p:cNvPr id="15" name="Shape 13"/>
+          <p:cNvSpPr/>
+          <p:nvPr/>
+        </p:nvSpPr>
+        <p:spPr>
+          <a:xfrm>
+            <a:off x="868680" y="3721608"/>
+            <a:ext cx="457200" cy="457200"/>
+          </a:xfrm>
+          <a:prstGeom prst="ellipse">
+            <a:avLst/>
+          </a:prstGeom>
+          <a:solidFill>
+            <a:srgbClr val="66BB6A"/>
+          </a:solidFill>
+          <a:ln/>
+        </p:spPr>
+        <p:txBody>
+          <a:bodyPr/>
+          <a:lstStyle/>
+          <a:p>
+            <a:endParaRPr lang="en-KR"/>
+          </a:p>
+        </p:txBody>
+      </p:sp>
+      <p:sp>
+        <p:nvSpPr>
+          <p:cNvPr id="16" name="Shape 14"/>
+          <p:cNvSpPr/>
+          <p:nvPr/>
+        </p:nvSpPr>
+        <p:spPr>
+          <a:xfrm>
+            <a:off x="978408" y="3959352"/>
+            <a:ext cx="86868" cy="82296"/>
+          </a:xfrm>
+          <a:prstGeom prst="line">
+            <a:avLst/>
+          </a:prstGeom>
+          <a:noFill/>
+          <a:ln w="27940">
+            <a:solidFill>
+              <a:srgbClr val="FFFFFF"/>
+            </a:solidFill>
+            <a:prstDash val="solid"/>
+          </a:ln>
+        </p:spPr>
+        <p:txBody>
+          <a:bodyPr/>
+          <a:lstStyle/>
+          <a:p>
+            <a:endParaRPr lang="en-KR"/>
+          </a:p>
+        </p:txBody>
+      </p:sp>
+      <p:sp>
+        <p:nvSpPr>
+          <p:cNvPr id="17" name="Shape 15"/>
+          <p:cNvSpPr/>
+          <p:nvPr/>
+        </p:nvSpPr>
+        <p:spPr>
+          <a:xfrm flipV="1">
+            <a:off x="1065276" y="3872484"/>
+            <a:ext cx="160020" cy="169164"/>
+          </a:xfrm>
+          <a:prstGeom prst="line">
+            <a:avLst/>
+          </a:prstGeom>
+          <a:noFill/>
+          <a:ln w="27940">
+            <a:solidFill>
+              <a:srgbClr val="FFFFFF"/>
+            </a:solidFill>
+            <a:prstDash val="solid"/>
+          </a:ln>
+        </p:spPr>
+        <p:txBody>
+          <a:bodyPr/>
+          <a:lstStyle/>
+          <a:p>
+            <a:endParaRPr lang="en-KR"/>
+          </a:p>
+        </p:txBody>
+      </p:sp>
+      <p:sp>
+        <p:nvSpPr>
+          <p:cNvPr id="18" name="Text 16"/>
+          <p:cNvSpPr/>
+          <p:nvPr/>
+        </p:nvSpPr>
+        <p:spPr>
+          <a:xfrm>
+            <a:off x="1554480" y="3502152"/>
+            <a:ext cx="6720840" cy="896112"/>
+          </a:xfrm>
+          <a:prstGeom prst="rect">
+            <a:avLst/>
+          </a:prstGeom>
+          <a:noFill/>
+          <a:ln/>
+        </p:spPr>
+        <p:txBody>
+          <a:bodyPr wrap="square" lIns="0" tIns="0" rIns="0" bIns="0" rtlCol="0" anchor="ctr"/>
+          <a:lstStyle/>
+          <a:p>
+            <a:pPr marL="0" indent="0">
+              <a:lnSpc>
+                <a:spcPct val="110000"/>
+              </a:lnSpc>
+              <a:buNone/>
+            </a:pPr>
+            <a:r>
+              <a:rPr lang="en-US" sz="1600" b="1" dirty="0">
+                <a:solidFill>
+                  <a:srgbClr val="1B5E20"/>
+                </a:solidFill>
+                <a:latin typeface="Paperlogy" pitchFamily="34" charset="0"/>
+                <a:ea typeface="Paperlogy" pitchFamily="34" charset="-122"/>
+                <a:cs typeface="Paperlogy" pitchFamily="34" charset="-120"/>
+              </a:rPr>
+              <a:t>오늘 배운 ‘키는 비밀’ 원칙
+</a:t>
+            </a:r>
+            <a:r>
+              <a:rPr lang="en-US" sz="1300" dirty="0">
+                <a:solidFill>
+                  <a:srgbClr val="5B6B60"/>
+                </a:solidFill>
+                <a:latin typeface="Paperlogy" pitchFamily="34" charset="0"/>
+                <a:ea typeface="Paperlogy" pitchFamily="34" charset="-122"/>
+                <a:cs typeface="Paperlogy" pitchFamily="34" charset="-120"/>
+              </a:rPr>
+              <a:t>이 수업이 처음부터 지키고 있었던 것!</a:t>
             </a:r>
             <a:endParaRPr lang="en-US" sz="1600" dirty="0"/>
           </a:p>

--- a/docs/닥터그린_수업_슬라이드.pptx
+++ b/docs/닥터그린_수업_슬라이드.pptx
@@ -318,6 +318,24 @@
               <a:t>오늘은 코드를 타이핑하지 않고 버튼으로 스마트팜 앱 하나를 완성한다는 것을 예고.</a:t>
             </a:r>
           </a:p>
+          <a:p>
+            <a:r>
+              <a:rPr lang="en-US" dirty="0"/>
+              <a:t>⏱ 도입 10분(00:00~10:00). 인사 후 이 화면에서 시작.</a:t>
+            </a:r>
+          </a:p>
+          <a:p>
+            <a:r>
+              <a:rPr lang="en-US" dirty="0"/>
+              <a:t>▶ 멘트: “오늘 타이핑은 인증키 붙여넣기 한 번뿐입니다. 하지만 버튼을 누를 때마다 진짜 개발자들이 쓰는 코드와 데이터베이스가 실시간으로 움직이는 걸 보게 됩니다. 그게 오늘의 관전 포인트예요.”</a:t>
+            </a:r>
+          </a:p>
+          <a:p>
+            <a:r>
+              <a:rPr lang="en-US" dirty="0"/>
+              <a:t>전환: 다음 슬라이드의 질문으로 동기 유발(3분).</a:t>
+            </a:r>
+          </a:p>
         </p:txBody>
       </p:sp>
       <p:sp>
@@ -400,7 +418,34 @@
           <a:bodyPr/>
           <a:lstStyle/>
           <a:p>
-            <a:endParaRPr lang="en-US" dirty="0"/>
+            <a:r>
+              <a:rPr lang="en-US" dirty="0"/>
+              <a:t>👀 이 수업 최고의 리얼리티 순간: 화면의 기온을 지금 창밖·핸드폰 날씨 앱과 직접 비교하게 할 것 — ‘진짜 데이터’ 확인.</a:t>
+            </a:r>
+          </a:p>
+          <a:p>
+            <a:r>
+              <a:rPr lang="en-US" dirty="0"/>
+              <a:t>👀 nx/ny = 위경도를 기상청 예보 지도의 칸 번호로 바꾼 격자 좌표. 저장 연출은 가상 Supabase지만 ‘테이블에 쌓이는 구조’는 실제 서비스와 동일.</a:t>
+            </a:r>
+          </a:p>
+          <a:p>
+            <a:r>
+              <a:rPr lang="en-US" dirty="0"/>
+              <a:t>빨리 끝낸 학생: 5개 지역 버튼을 전부 눌러 지역별 기온 비교(활동지 B), 옆 친구와 ‘내 위치’ 값 비교.</a:t>
+            </a:r>
+          </a:p>
+          <a:p>
+            <a:r>
+              <a:rPr lang="en-US" dirty="0"/>
+              <a:t>Q. “왜 친구랑 온도가 조금 달라요?” → A. 위치(격자 칸)가 다르면 관측값이 다릅니다.</a:t>
+            </a:r>
+          </a:p>
+          <a:p>
+            <a:r>
+              <a:rPr lang="en-US" dirty="0"/>
+              <a:t>⏱ 25:00까지 마무리. 전환: “이제 오늘의 핵심 — AI를 직접 가르쳐 봅시다.”</a:t>
+            </a:r>
           </a:p>
         </p:txBody>
       </p:sp>
@@ -484,7 +529,16 @@
           <a:bodyPr/>
           <a:lstStyle/>
           <a:p>
-            <a:endParaRPr lang="en-US" dirty="0"/>
+            <a:r>
+              <a:rPr lang="en-US" dirty="0"/>
+              <a:t>⏱ STEP 2 — 30분(25:00~55:00). 수업의 핵심이라 가장 길게 배정.</a:t>
+            </a:r>
+          </a:p>
+          <a:p>
+            <a:r>
+              <a:rPr lang="en-US" dirty="0"/>
+              <a:t>▶ 도입 멘트: “AI는 태어날 때부터 병든 잎을 아는 게 아니에요. 사람이 정답을 알려준 사진(라벨링)을 수십 번 반복해서 보여주면(epoch) 점점 실수가 줄어듭니다(loss). 오늘 여러분이 직접 AI 선생님이 됩니다.”</a:t>
+            </a:r>
           </a:p>
         </p:txBody>
       </p:sp>
@@ -573,6 +627,24 @@
               <a:t>“오늘 여러분이 직접 AI 선생님이 됩니다.”</a:t>
             </a:r>
           </a:p>
+          <a:p>
+            <a:r>
+              <a:rPr lang="en-US" dirty="0"/>
+              <a:t>👀 라벨링 = ‘사람이 정답을 다는 일’ — 그래서 ‘데이터 라벨러’라는 직업이 있음을 언급(마지막 진로 슬라이드에서 회수됨).</a:t>
+            </a:r>
+          </a:p>
+          <a:p>
+            <a:r>
+              <a:rPr lang="en-US" dirty="0"/>
+              <a:t>Q. “라벨링을 사람이 다 해요?” → A. 그렇습니다. 실제로도 사람이 정답을 답니다.</a:t>
+            </a:r>
+          </a:p>
+          <a:p>
+            <a:r>
+              <a:rPr lang="en-US" dirty="0"/>
+              <a:t>전환: “그럼 직접 가르쳐 봅시다” → 조작 슬라이드.</a:t>
+            </a:r>
+          </a:p>
         </p:txBody>
       </p:sp>
       <p:sp>
@@ -655,7 +727,22 @@
           <a:bodyPr/>
           <a:lstStyle/>
           <a:p>
-            <a:endParaRPr lang="en-US" dirty="0"/>
+            <a:r>
+              <a:rPr lang="en-US" dirty="0"/>
+              <a:t>조작: ① ‘샘플 잎 사진 100장 불러오기’ ② ‘직접 라벨링 체험’에서 6장을 내 손으로 건강/병 분류하고 채점(2~3분 — 라벨링이 ‘사람이 정답을 다는 일’임을 몸으로 체험) ③ epoch 슬라이더는 처음엔 기본값 15 권장 ④ ‘학습 시작’.</a:t>
+            </a:r>
+          </a:p>
+          <a:p>
+            <a:r>
+              <a:rPr lang="en-US" dirty="0"/>
+              <a:t>👀 짚기: 학습 시작 후 사진마다 자동으로 붙는 색 테두리는 사람이 미리 달아둔 정답을 불러오는 연출임을 설명할 것.</a:t>
+            </a:r>
+          </a:p>
+          <a:p>
+            <a:r>
+              <a:rPr lang="en-US" dirty="0"/>
+              <a:t>전환: 학습 곡선이 그려지기 시작하면 전원 손을 멈추게 하고 다음 슬라이드(그래프 해석)로.</a:t>
+            </a:r>
           </a:p>
         </p:txBody>
       </p:sp>
@@ -744,6 +831,24 @@
               <a:t>이 순간 전체 학생을 잠깐 멈추게 하고 함께 그래프를 해석할 것 — 수업 최고의 장면.</a:t>
             </a:r>
           </a:p>
+          <a:p>
+            <a:r>
+              <a:rPr lang="en-US" dirty="0"/>
+              <a:t>▶ 멘트: “실수(loss)는 줄고, 정답률(accuracy)은 올라간다. 이게 ‘학습’의 정체입니다.”</a:t>
+            </a:r>
+          </a:p>
+          <a:p>
+            <a:r>
+              <a:rPr lang="en-US" dirty="0"/>
+              <a:t>👀 앱 그래프는 하락까지는 보여주지 않으므로 수확체감·과적합(암기해 버려 처음 보는 사진에 오히려 약해짐)은 교사가 말로 짚을 것 — 마무리 퀴즈 출제 범위.</a:t>
+            </a:r>
+          </a:p>
+          <a:p>
+            <a:r>
+              <a:rPr lang="en-US" dirty="0"/>
+              <a:t>Q. “epoch을 30으로 하면 뭐가 달라져요?” → A. 더 오래 공부하는 것. 대체로 정확도가 오르지만, 너무 반복하면 ‘과잉 학습(암기)’ 문제도 생깁니다.</a:t>
+            </a:r>
+          </a:p>
         </p:txBody>
       </p:sp>
       <p:sp>
@@ -826,7 +931,34 @@
           <a:bodyPr/>
           <a:lstStyle/>
           <a:p>
-            <a:endParaRPr lang="en-US" dirty="0"/>
+            <a:r>
+              <a:rPr lang="en-US" dirty="0"/>
+              <a:t>조작: ‘새 잎 사진 진단하기’ → 작물+진단+신뢰도(%)가 나오고 diagnoses 테이블에 INSERT → 진행도 2/4.</a:t>
+            </a:r>
+          </a:p>
+          <a:p>
+            <a:r>
+              <a:rPr lang="en-US" dirty="0"/>
+              <a:t>👀 핵심: 신뢰도는 60~97% — AI는 확신이 아니라 ‘확률’로 답한다. 75% 미만(약 4번에 1번꼴)이면 실제로 ‘판단보류’ 배지가 뜬다 — “좋은 AI는 모를 때 모른다고 말한다”를 전체에게 소리 내어 짚을 것(마무리 퀴즈 출제).</a:t>
+            </a:r>
+          </a:p>
+          <a:p>
+            <a:r>
+              <a:rPr lang="en-US" dirty="0"/>
+              <a:t>빨리 끝낸 학생: 판단보류 3회 수집 챌린지, ‘테스트 잎으로 정밀도 확인’(TP/FP 혼동행렬 → 활동지 B에 옮겨 정밀도 계산).</a:t>
+            </a:r>
+          </a:p>
+          <a:p>
+            <a:r>
+              <a:rPr lang="en-US" dirty="0"/>
+              <a:t>Q. “100장으로 충분해요?” → A. 수업용 시뮬레이션 기준. 실제 YOLO 모델은 수천~수만 장을 씁니다.</a:t>
+            </a:r>
+          </a:p>
+          <a:p>
+            <a:r>
+              <a:rPr lang="en-US" dirty="0"/>
+              <a:t>⏱ 55:00까지. 전환: “10분 쉬고 STEP 3에서 만나요.”</a:t>
+            </a:r>
           </a:p>
         </p:txBody>
       </p:sp>
@@ -910,7 +1042,16 @@
           <a:bodyPr/>
           <a:lstStyle/>
           <a:p>
-            <a:endParaRPr lang="en-US" dirty="0"/>
+            <a:r>
+              <a:rPr lang="en-US" dirty="0"/>
+              <a:t>⏱ STEP 3 — 20분(65:00~85:00).</a:t>
+            </a:r>
+          </a:p>
+          <a:p>
+            <a:r>
+              <a:rPr lang="en-US" dirty="0"/>
+              <a:t>▶ 도입 멘트: “화분 옆에 붙은 작은 컴퓨터(ESP32)가 1.5초마다 온도·습도를 재서 WiFi로 데이터베이스에 보냅니다. 오늘은 여러분 손가락이 온도계 역할을 합니다.”</a:t>
+            </a:r>
           </a:p>
         </p:txBody>
       </p:sp>
@@ -994,7 +1135,40 @@
           <a:bodyPr/>
           <a:lstStyle/>
           <a:p>
-            <a:endParaRPr lang="en-US" dirty="0"/>
+            <a:r>
+              <a:rPr lang="en-US" dirty="0"/>
+              <a:t>조작: 전원 켜기(⚫→🟢) → 슬라이더로 온도·습도·토양수분 설정 → ‘측정값 1회 전송’(이 순간 연결 완료, 진행도 3/4) → ‘자동측정 시작’(1.5초마다) → ‘입김 불기’·‘물 주기’ 버튼으로 그래프 변화 관찰.</a:t>
+            </a:r>
+          </a:p>
+          <a:p>
+            <a:r>
+              <a:rPr lang="en-US" dirty="0"/>
+              <a:t>👀 흐름도 애니메이션(센서→인터넷→데이터베이스→앱 그래프)이 실물 스마트팜과 완전히 같은 구조. 전송값에 섞이는 작은 노이즈도 짚기 — 실제 센서도 항상 미세하게 흔들린다.</a:t>
+            </a:r>
+          </a:p>
+          <a:p>
+            <a:r>
+              <a:rPr lang="en-US" dirty="0"/>
+              <a:t>👀 토양수분은 캡스톤 물 주기 규칙과 심화 결합 진단의 기준 — 여기서 개념을 잡아두면 뒤가 편함.</a:t>
+            </a:r>
+          </a:p>
+          <a:p>
+            <a:r>
+              <a:rPr lang="en-US" dirty="0"/>
+              <a:t>빨리 끝낸 학생: ‘이상치 탐정’ — 짝이 몰래 넣은 입김 이벤트의 시각을 실시간 그래프만 보고 찾기(활동지 B).</a:t>
+            </a:r>
+          </a:p>
+          <a:p>
+            <a:r>
+              <a:rPr lang="en-US" dirty="0"/>
+              <a:t>Q. “실제로도 슬라이더로 조절해요?” → A. 아니요. 실제로는 DHT11 같은 센서가 진짜 공기를 잽니다. 슬라이더는 ‘자연’ 역할의 시뮬레이션.</a:t>
+            </a:r>
+          </a:p>
+          <a:p>
+            <a:r>
+              <a:rPr lang="en-US" dirty="0"/>
+              <a:t>⏱ 85:00까지. 전환: “이제 마지막 기술 — 멀리 있는 농장을 봅시다.”</a:t>
+            </a:r>
           </a:p>
         </p:txBody>
       </p:sp>
@@ -1078,7 +1252,16 @@
           <a:bodyPr/>
           <a:lstStyle/>
           <a:p>
-            <a:endParaRPr lang="en-US" dirty="0"/>
+            <a:r>
+              <a:rPr lang="en-US" dirty="0"/>
+              <a:t>⏱ STEP 4 — 10분(85:00~95:00).</a:t>
+            </a:r>
+          </a:p>
+          <a:p>
+            <a:r>
+              <a:rPr lang="en-US" dirty="0"/>
+              <a:t>▶ 도입 멘트: “멀리 있는 농장을 핸드폰으로 보려면? 카메라가 영상을 클라우드에 올리고, 앱은 그 ‘주소’만 알면 됩니다.”</a:t>
+            </a:r>
           </a:p>
         </p:txBody>
       </p:sp>
@@ -1162,7 +1345,34 @@
           <a:bodyPr/>
           <a:lstStyle/>
           <a:p>
-            <a:endParaRPr lang="en-US" dirty="0"/>
+            <a:r>
+              <a:rPr lang="en-US" dirty="0"/>
+              <a:t>조작: ‘카메라 연결하기’(camera_url 발급) → ‘라이브 켜기’(진행도 4/4 달성!) → ‘스냅샷 한 장 더 찍기’ 3~4회 반복.</a:t>
+            </a:r>
+          </a:p>
+          <a:p>
+            <a:r>
+              <a:rPr lang="en-US" dirty="0"/>
+              <a:t>활동(감지 로그 타임라인): camera_frames의 note 열(딸기 잎/꽃/열매/포기 전체 감지)을 시간순으로 읽어 “오늘 농장에 무슨 일이 있었나”를 한 문장으로 재구성해 발표시키기.</a:t>
+            </a:r>
+          </a:p>
+          <a:p>
+            <a:r>
+              <a:rPr lang="en-US" dirty="0"/>
+              <a:t>👀 연결고리: STEP 2의 AI 비전이 카메라 영상과 만나면 ‘자동 감시’. camera_url도 열쇠 — 초기 비밀번호를 안 바꾼 가정용 IP카메라 해킹·유출 사건을 언급하며 STEP 1 인증키와 같은 원리임을 짚기.</a:t>
+            </a:r>
+          </a:p>
+          <a:p>
+            <a:r>
+              <a:rPr lang="en-US" dirty="0"/>
+              <a:t>Q. “영상 전체가 DB에 저장돼요?” → A. 보통 영상은 스토리지에, DB에는 프레임 파일 이름과 감지 결과 같은 ‘기록’만 저장합니다.</a:t>
+            </a:r>
+          </a:p>
+          <a:p>
+            <a:r>
+              <a:rPr lang="en-US" dirty="0"/>
+              <a:t>전환: “4/4 완성! 이제 내 앱을 열어봅시다.”</a:t>
+            </a:r>
           </a:p>
         </p:txBody>
       </p:sp>
@@ -1251,6 +1461,24 @@
               <a:t>스마트팜 사진/영상 1~2장이 있으면 이 슬라이드 전후에 보여줄 것. 실물 딸기 디바이스가 있으면 잠깐 예고.</a:t>
             </a:r>
           </a:p>
+          <a:p>
+            <a:r>
+              <a:rPr lang="en-US" dirty="0"/>
+              <a:t>▶ 멘트(3분): 슬라이드 문구를 그대로 읽고 잠깐 뜸 들이기 — “그 농장이 바로 스마트팜입니다.”</a:t>
+            </a:r>
+          </a:p>
+          <a:p>
+            <a:r>
+              <a:rPr lang="en-US" dirty="0"/>
+              <a:t>실물 딸기 디바이스가 있으면 이때 잠깐 들어 보이며 “이것과 똑같은 구조를 오늘 여러분이 직접 만든다”고 예고.</a:t>
+            </a:r>
+          </a:p>
+          <a:p>
+            <a:r>
+              <a:rPr lang="en-US" dirty="0"/>
+              <a:t>전환: “스마트팜은 어떤 기술로 이뤄질까요?” → 4가지 기술 슬라이드로.</a:t>
+            </a:r>
+          </a:p>
         </p:txBody>
       </p:sp>
       <p:sp>
@@ -1333,7 +1561,28 @@
           <a:bodyPr/>
           <a:lstStyle/>
           <a:p>
-            <a:endParaRPr lang="en-US" dirty="0"/>
+            <a:r>
+              <a:rPr lang="en-US" dirty="0"/>
+              <a:t>⏱ 내 앱 확인 4분(95:00~). 허브 우상단 ‘내 앱’ → 폰 목업에서 4개 기능이 모두 켜졌는지 확인.</a:t>
+            </a:r>
+          </a:p>
+          <a:p>
+            <a:r>
+              <a:rPr lang="en-US" dirty="0"/>
+              <a:t>아직 못 끝낸 학생은 잠금 카드의 링크로 해당 STEP에 이동해 마저 완료 — 이 시간이 자연스러운 보충 시간.</a:t>
+            </a:r>
+          </a:p>
+          <a:p>
+            <a:r>
+              <a:rPr lang="en-US" dirty="0"/>
+              <a:t>▶ 정리 멘트: “여러분이 오늘 연결한 4개의 기술이 모여 이 앱 하나가 됐습니다. 세상의 모든 앱이 이런 식으로 여러 기술과 데이터의 조합입니다.”</a:t>
+            </a:r>
+          </a:p>
+          <a:p>
+            <a:r>
+              <a:rPr lang="en-US" dirty="0"/>
+              <a:t>전환: “이제 이 앱이 사람 없이 스스로 판단하게 만들어 봅시다” → 캡스톤.</a:t>
+            </a:r>
           </a:p>
         </p:txBody>
       </p:sp>
@@ -1422,6 +1671,24 @@
               <a:t>실물 장비가 있을 때만 사용. 없으면 이 슬라이드 건너뛰기.</a:t>
             </a:r>
           </a:p>
+          <a:p>
+            <a:r>
+              <a:rPr lang="en-US" dirty="0"/>
+              <a:t>⏱ 3분. 보드의 온습도 센서(DHT11)·토양수분 센서·LED를 가리키고, LCD의 실시간 온습도를 확인시키기.</a:t>
+            </a:r>
+          </a:p>
+          <a:p>
+            <a:r>
+              <a:rPr lang="en-US" dirty="0"/>
+              <a:t>👀 실제 닥터그린 앱의 실시간 화면을 띄워 진짜 Supabase로 2초마다 전송됨을 시연 — 단, 앱 화면 갱신은 5초 주기라 화면은 5초에 한 번 바뀜(멈춘 것이 아님).</a:t>
+            </a:r>
+          </a:p>
+          <a:p>
+            <a:r>
+              <a:rPr lang="en-US" dirty="0"/>
+              <a:t>센서 LCD 수치와 앱 수치가 같음을 확인시키면 ‘가상 실습실 = 실물과 같은 구조’ 메시지가 완성됨.</a:t>
+            </a:r>
+          </a:p>
         </p:txBody>
       </p:sp>
       <p:sp>
@@ -1504,7 +1771,28 @@
           <a:bodyPr/>
           <a:lstStyle/>
           <a:p>
-            <a:endParaRPr lang="en-US" dirty="0"/>
+            <a:r>
+              <a:rPr lang="en-US" dirty="0"/>
+              <a:t>⏱ 마무리 10분(110:00~120:00) 시작. 기본은 허브의 ‘마무리 퀴즈’(인앱 7문항·자동 채점, 5분) — 이 슬라이드는 인앱 퀴즈가 어려울 때 쓰는 구두 예비 퀴즈.</a:t>
+            </a:r>
+          </a:p>
+          <a:p>
+            <a:r>
+              <a:rPr lang="en-US" dirty="0"/>
+              <a:t>문항 범위: 인증키 보안 / epoch / 수확체감·과적합 / 오탐 / ESP32 / 판단보류(신뢰도 75%) / 자동화 규칙 — 모두 오늘 다룬 내용.</a:t>
+            </a:r>
+          </a:p>
+          <a:p>
+            <a:r>
+              <a:rPr lang="en-US" dirty="0"/>
+              <a:t>교사는 순회하며 점수 확인. 3번 보충: 내려가는 값은 loss, 올라가는 값은 accuracy(정확도).</a:t>
+            </a:r>
+          </a:p>
+          <a:p>
+            <a:r>
+              <a:rPr lang="en-US" dirty="0"/>
+              <a:t>전환: “마지막으로, 오늘 여러분에게 말하지 않은 비밀이 하나 있습니다.” → 비밀 공개.</a:t>
+            </a:r>
           </a:p>
         </p:txBody>
       </p:sp>
@@ -1588,7 +1876,22 @@
           <a:bodyPr/>
           <a:lstStyle/>
           <a:p>
-            <a:endParaRPr lang="en-US" dirty="0"/>
+            <a:r>
+              <a:rPr lang="en-US" dirty="0"/>
+              <a:t>⏱ 1분. ▶ 멘트: “오늘 버튼으로 해본 것을 코드로 직접 짜는 사람들이 바로 이 직업들입니다.”</a:t>
+            </a:r>
+          </a:p>
+          <a:p>
+            <a:r>
+              <a:rPr lang="en-US" dirty="0"/>
+              <a:t>각 직업을 오늘 활동과 연결해 한 번씩만 터치: 스마트팜 엔지니어(전체 시스템)·AI 개발자(STEP2 학습)·데이터 라벨러(STEP2 라벨링)·IoT 임베디드 개발자(STEP3 센서)·백엔드 개발자(데이터베이스).</a:t>
+            </a:r>
+          </a:p>
+          <a:p>
+            <a:r>
+              <a:rPr lang="en-US" dirty="0"/>
+              <a:t>전환: 마지막 슬라이드로 — 수고 인사.</a:t>
+            </a:r>
           </a:p>
         </p:txBody>
       </p:sp>
@@ -1672,7 +1975,16 @@
           <a:bodyPr/>
           <a:lstStyle/>
           <a:p>
-            <a:endParaRPr lang="en-US" dirty="0"/>
+            <a:r>
+              <a:rPr lang="en-US" dirty="0"/>
+              <a:t>▶ 종료 멘트: “스마트팜 앱 개발에 성공한 여러분, 수고하셨습니다!” — 박수로 마무리.</a:t>
+            </a:r>
+          </a:p>
+          <a:p>
+            <a:r>
+              <a:rPr lang="en-US" dirty="0"/>
+              <a:t>수업 후 정리: 각 학생 PC에서 ‘모든 방 초기화 (선생님용)’ 실행 — 데이터가 각 PC 브라우저에 저장되므로 교사 PC 한 대에서 전체 정리는 불가.</a:t>
+            </a:r>
           </a:p>
         </p:txBody>
       </p:sp>
@@ -1761,6 +2073,30 @@
               <a:t>규칙 1~2명 발표. ‘왜’를 묻는 것이 핵심.</a:t>
             </a:r>
           </a:p>
+          <a:p>
+            <a:r>
+              <a:rPr lang="en-US" dirty="0"/>
+              <a:t>⏱ 8분. 목표: 규칙 3개 이상 + 서로 다른 데이터 3종 이상(화면 체크리스트로 확인) → 규칙 시뮬레이터로 가상 상황을 바꿔 발동 확인.</a:t>
+            </a:r>
+          </a:p>
+          <a:p>
+            <a:r>
+              <a:rPr lang="en-US" dirty="0"/>
+              <a:t>👀 물 주기 규칙은 공기 습도가 아니라 토양수분(‘40% 아래로 내려가면’)으로 만들게 안내 — 실제 농업의 관수 판단 기준은 흙의 수분(딸기 기준, 실제 닥터그린 앱과 같은 경계).</a:t>
+            </a:r>
+          </a:p>
+          <a:p>
+            <a:r>
+              <a:rPr lang="en-US" dirty="0"/>
+              <a:t>▶ 짚기: “방금 만든 것이 프로그래밍의 조건문(if→then)입니다. 사람이 없어도 스스로 판단하는 스마트팜 — 수업 처음 질문의 답이에요.”</a:t>
+            </a:r>
+          </a:p>
+          <a:p>
+            <a:r>
+              <a:rPr lang="en-US" dirty="0"/>
+              <a:t>Q. “조건 두 개를 동시에 걸 수 없나요?” → A. 실제 시스템은 AND/OR로 조건을 조합합니다 — 심화 모듈의 ‘결합 판정’이 그 예.</a:t>
+            </a:r>
+          </a:p>
         </p:txBody>
       </p:sp>
       <p:sp>
@@ -1848,6 +2184,18 @@
               <a:t>학생이 중간에 눈치챘더라도 여기서 공개 — ‘보안 원칙을 지키기 위한 설계’로 뒤집는 것이 포인트.</a:t>
             </a:r>
           </a:p>
+          <a:p>
+            <a:r>
+              <a:rPr lang="en-US" dirty="0"/>
+              <a:t>⏱ 2분. 공개 스크립트는 슬라이드 문구 그대로 — “오늘 배운 ‘키는 비밀’ 원칙을, 사실은 이 수업 자체가 처음부터 지키고 있었던 거예요.”</a:t>
+            </a:r>
+          </a:p>
+          <a:p>
+            <a:r>
+              <a:rPr lang="en-US" dirty="0"/>
+              <a:t>미리 눈치챈 학생이 있었다면: “그걸 발견했다면 이미 보안 감각이 있는 것”이라고 격려.</a:t>
+            </a:r>
+          </a:p>
         </p:txBody>
       </p:sp>
       <p:sp>
@@ -1879,6 +2227,276 @@
         <p14:creationId xmlns:p14="http://schemas.microsoft.com/office/powerpoint/2010/main" val="1024086991"/>
       </p:ext>
     </p:extLst>
+  </p:cSld>
+  <p:clrMapOvr>
+    <a:masterClrMapping/>
+  </p:clrMapOvr>
+</p:notes>
+</file>
+
+<file path=ppt/notesSlides/notesSlide27.xml><?xml version="1.0" encoding="utf-8"?>
+<p:notes xmlns:a="http://schemas.openxmlformats.org/drawingml/2006/main" xmlns:r="http://schemas.openxmlformats.org/officeDocument/2006/relationships" xmlns:p="http://schemas.openxmlformats.org/presentationml/2006/main">
+  <p:cSld>
+    <p:spTree>
+      <p:nvGrpSpPr>
+        <p:cNvPr id="1" name=""/>
+        <p:cNvGrpSpPr/>
+        <p:nvPr/>
+      </p:nvGrpSpPr>
+      <p:grpSpPr>
+        <a:xfrm>
+          <a:off x="0" y="0"/>
+          <a:ext cx="0" cy="0"/>
+          <a:chOff x="0" y="0"/>
+          <a:chExt cx="0" cy="0"/>
+        </a:xfrm>
+      </p:grpSpPr>
+      <p:sp>
+        <p:nvSpPr>
+          <p:cNvPr id="2" name="Slide Image Placeholder 1"/>
+          <p:cNvSpPr>
+            <a:spLocks noGrp="1" noRot="1" noChangeAspect="1"/>
+          </p:cNvSpPr>
+          <p:nvPr>
+            <p:ph type="sldImg"/>
+          </p:nvPr>
+        </p:nvSpPr>
+        <p:spPr/>
+      </p:sp>
+      <p:sp>
+        <p:nvSpPr>
+          <p:cNvPr id="3" name="Notes Placeholder 2"/>
+          <p:cNvSpPr>
+            <a:spLocks noGrp="1"/>
+          </p:cNvSpPr>
+          <p:nvPr>
+            <p:ph type="body" idx="1"/>
+          </p:nvPr>
+        </p:nvSpPr>
+        <p:spPr/>
+        <p:txBody>
+          <a:bodyPr/>
+          <a:lstStyle/>
+          <a:p>
+            <a:r>
+              <a:rPr lang="en-US" dirty="0"/>
+              <a:t>⏱ 휴식 10분(55:00~65:00). 뒤처진 학생은 이 시간에 STEP 1~2를 보충하게 해도 좋음.</a:t>
+            </a:r>
+          </a:p>
+          <a:p>
+            <a:r>
+              <a:rPr lang="en-US" dirty="0"/>
+              <a:t>재개 신호: “다음은 IoT 센서 — 여러분 손가락이 온도계가 됩니다.”</a:t>
+            </a:r>
+          </a:p>
+        </p:txBody>
+      </p:sp>
+      <p:sp>
+        <p:nvSpPr>
+          <p:cNvPr id="4" name="Slide Number Placeholder 3"/>
+          <p:cNvSpPr>
+            <a:spLocks noGrp="1"/>
+          </p:cNvSpPr>
+          <p:nvPr>
+            <p:ph type="sldNum" sz="quarter" idx="10"/>
+          </p:nvPr>
+        </p:nvSpPr>
+        <p:spPr/>
+        <p:txBody>
+          <a:bodyPr/>
+          <a:lstStyle/>
+          <a:p>
+            <a:fld id="{F7021451-1387-4CA6-816F-3879F97B5CBC}" type="slidenum">
+              <a:rPr lang="en-US"/>
+              <a:t>1</a:t>
+            </a:fld>
+            <a:endParaRPr lang="en-US"/>
+          </a:p>
+        </p:txBody>
+      </p:sp>
+    </p:spTree>
+  </p:cSld>
+  <p:clrMapOvr>
+    <a:masterClrMapping/>
+  </p:clrMapOvr>
+</p:notes>
+</file>
+
+<file path=ppt/notesSlides/notesSlide28.xml><?xml version="1.0" encoding="utf-8"?>
+<p:notes xmlns:a="http://schemas.openxmlformats.org/drawingml/2006/main" xmlns:r="http://schemas.openxmlformats.org/officeDocument/2006/relationships" xmlns:p="http://schemas.openxmlformats.org/presentationml/2006/main">
+  <p:cSld>
+    <p:spTree>
+      <p:nvGrpSpPr>
+        <p:cNvPr id="1" name=""/>
+        <p:cNvGrpSpPr/>
+        <p:nvPr/>
+      </p:nvGrpSpPr>
+      <p:grpSpPr>
+        <a:xfrm>
+          <a:off x="0" y="0"/>
+          <a:ext cx="0" cy="0"/>
+          <a:chOff x="0" y="0"/>
+          <a:chExt cx="0" cy="0"/>
+        </a:xfrm>
+      </p:grpSpPr>
+      <p:sp>
+        <p:nvSpPr>
+          <p:cNvPr id="2" name="Slide Image Placeholder 1"/>
+          <p:cNvSpPr>
+            <a:spLocks noGrp="1" noRot="1" noChangeAspect="1"/>
+          </p:cNvSpPr>
+          <p:nvPr>
+            <p:ph type="sldImg"/>
+          </p:nvPr>
+        </p:nvSpPr>
+        <p:spPr/>
+      </p:sp>
+      <p:sp>
+        <p:nvSpPr>
+          <p:cNvPr id="3" name="Notes Placeholder 2"/>
+          <p:cNvSpPr>
+            <a:spLocks noGrp="1"/>
+          </p:cNvSpPr>
+          <p:nvPr>
+            <p:ph type="body" idx="1"/>
+          </p:nvPr>
+        </p:nvSpPr>
+        <p:spPr/>
+        <p:txBody>
+          <a:bodyPr/>
+          <a:lstStyle/>
+          <a:p>
+            <a:r>
+              <a:rPr lang="en-US" dirty="0"/>
+              <a:t>※ 추가 차시용(약 25~30분, 실제 닥터그린 앱으로 진행) — 오늘 120분 수업에서는 예고만 하고 넘어갈 것.</a:t>
+            </a:r>
+          </a:p>
+          <a:p>
+            <a:r>
+              <a:rPr lang="en-US" dirty="0"/>
+              <a:t>▶ 예고 멘트: “오늘 배운 AI 비전과 센서, 이 두 데이터를 합치면 무슨 일이 생기는지는 다음 시간에 봅니다.”</a:t>
+            </a:r>
+          </a:p>
+        </p:txBody>
+      </p:sp>
+      <p:sp>
+        <p:nvSpPr>
+          <p:cNvPr id="4" name="Slide Number Placeholder 3"/>
+          <p:cNvSpPr>
+            <a:spLocks noGrp="1"/>
+          </p:cNvSpPr>
+          <p:nvPr>
+            <p:ph type="sldNum" sz="quarter" idx="10"/>
+          </p:nvPr>
+        </p:nvSpPr>
+        <p:spPr/>
+        <p:txBody>
+          <a:bodyPr/>
+          <a:lstStyle/>
+          <a:p>
+            <a:fld id="{F7021451-1387-4CA6-816F-3879F97B5CBC}" type="slidenum">
+              <a:rPr lang="en-US"/>
+              <a:t>1</a:t>
+            </a:fld>
+            <a:endParaRPr lang="en-US"/>
+          </a:p>
+        </p:txBody>
+      </p:sp>
+    </p:spTree>
+  </p:cSld>
+  <p:clrMapOvr>
+    <a:masterClrMapping/>
+  </p:clrMapOvr>
+</p:notes>
+</file>
+
+<file path=ppt/notesSlides/notesSlide29.xml><?xml version="1.0" encoding="utf-8"?>
+<p:notes xmlns:a="http://schemas.openxmlformats.org/drawingml/2006/main" xmlns:r="http://schemas.openxmlformats.org/officeDocument/2006/relationships" xmlns:p="http://schemas.openxmlformats.org/presentationml/2006/main">
+  <p:cSld>
+    <p:spTree>
+      <p:nvGrpSpPr>
+        <p:cNvPr id="1" name=""/>
+        <p:cNvGrpSpPr/>
+        <p:nvPr/>
+      </p:nvGrpSpPr>
+      <p:grpSpPr>
+        <a:xfrm>
+          <a:off x="0" y="0"/>
+          <a:ext cx="0" cy="0"/>
+          <a:chOff x="0" y="0"/>
+          <a:chExt cx="0" cy="0"/>
+        </a:xfrm>
+      </p:grpSpPr>
+      <p:sp>
+        <p:nvSpPr>
+          <p:cNvPr id="2" name="Slide Image Placeholder 1"/>
+          <p:cNvSpPr>
+            <a:spLocks noGrp="1" noRot="1" noChangeAspect="1"/>
+          </p:cNvSpPr>
+          <p:nvPr>
+            <p:ph type="sldImg"/>
+          </p:nvPr>
+        </p:nvSpPr>
+        <p:spPr/>
+      </p:sp>
+      <p:sp>
+        <p:nvSpPr>
+          <p:cNvPr id="3" name="Notes Placeholder 2"/>
+          <p:cNvSpPr>
+            <a:spLocks noGrp="1"/>
+          </p:cNvSpPr>
+          <p:nvPr>
+            <p:ph type="body" idx="1"/>
+          </p:nvPr>
+        </p:nvSpPr>
+        <p:spPr/>
+        <p:txBody>
+          <a:bodyPr/>
+          <a:lstStyle/>
+          <a:p>
+            <a:r>
+              <a:rPr lang="en-US" dirty="0"/>
+              <a:t>(추가 차시) 문제 제기: 노란 잎 사진 한 장만 놓고 “이것만으로 원인을 맞혀보라” — 학생들이 못 맞히는 것이 포인트.</a:t>
+            </a:r>
+          </a:p>
+          <a:p>
+            <a:r>
+              <a:rPr lang="en-US" dirty="0"/>
+              <a:t>▶ 핵심 한 줄: “잎만 보면 노랗다는 것만, 흙만 보면 젖었다는 것만 안다. 둘을 합쳐야 비로소 ‘과습’이라고 말할 수 있다.”</a:t>
+            </a:r>
+          </a:p>
+          <a:p>
+            <a:r>
+              <a:rPr lang="en-US" dirty="0"/>
+              <a:t>오늘 수업에서는 이 한 줄만 던지고 다음 슬라이드로.</a:t>
+            </a:r>
+          </a:p>
+        </p:txBody>
+      </p:sp>
+      <p:sp>
+        <p:nvSpPr>
+          <p:cNvPr id="4" name="Slide Number Placeholder 3"/>
+          <p:cNvSpPr>
+            <a:spLocks noGrp="1"/>
+          </p:cNvSpPr>
+          <p:nvPr>
+            <p:ph type="sldNum" sz="quarter" idx="10"/>
+          </p:nvPr>
+        </p:nvSpPr>
+        <p:spPr/>
+        <p:txBody>
+          <a:bodyPr/>
+          <a:lstStyle/>
+          <a:p>
+            <a:fld id="{F7021451-1387-4CA6-816F-3879F97B5CBC}" type="slidenum">
+              <a:rPr lang="en-US"/>
+              <a:t>1</a:t>
+            </a:fld>
+            <a:endParaRPr lang="en-US"/>
+          </a:p>
+        </p:txBody>
+      </p:sp>
+    </p:spTree>
   </p:cSld>
   <p:clrMapOvr>
     <a:masterClrMapping/>
@@ -1930,7 +2548,22 @@
           <a:bodyPr/>
           <a:lstStyle/>
           <a:p>
-            <a:endParaRPr lang="en-US" dirty="0"/>
+            <a:r>
+              <a:rPr lang="en-US" dirty="0"/>
+              <a:t>▶ 멘트(수업 구조 안내, 2분): “스마트팜은 이 4가지 기술의 조합입니다. 오늘 이 4개를 하나씩 직접 연결합니다.”</a:t>
+            </a:r>
+          </a:p>
+          <a:p>
+            <a:r>
+              <a:rPr lang="en-US" dirty="0"/>
+              <a:t>👀 짚기: 1~4 번호가 곧 오늘의 STEP 순서(날씨→AI 비전→센서→카메라).</a:t>
+            </a:r>
+          </a:p>
+          <a:p>
+            <a:r>
+              <a:rPr lang="en-US" dirty="0"/>
+              <a:t>전환: “이 4개를 연결하면 무엇이 될까요?” → 다음 슬라이드(앱 완성 구조)로.</a:t>
+            </a:r>
           </a:p>
         </p:txBody>
       </p:sp>
@@ -1963,6 +2596,358 @@
         <p14:creationId xmlns:p14="http://schemas.microsoft.com/office/powerpoint/2010/main" val="1024086991"/>
       </p:ext>
     </p:extLst>
+  </p:cSld>
+  <p:clrMapOvr>
+    <a:masterClrMapping/>
+  </p:clrMapOvr>
+</p:notes>
+</file>
+
+<file path=ppt/notesSlides/notesSlide30.xml><?xml version="1.0" encoding="utf-8"?>
+<p:notes xmlns:a="http://schemas.openxmlformats.org/drawingml/2006/main" xmlns:r="http://schemas.openxmlformats.org/officeDocument/2006/relationships" xmlns:p="http://schemas.openxmlformats.org/presentationml/2006/main">
+  <p:cSld>
+    <p:spTree>
+      <p:nvGrpSpPr>
+        <p:cNvPr id="1" name=""/>
+        <p:cNvGrpSpPr/>
+        <p:nvPr/>
+      </p:nvGrpSpPr>
+      <p:grpSpPr>
+        <a:xfrm>
+          <a:off x="0" y="0"/>
+          <a:ext cx="0" cy="0"/>
+          <a:chOff x="0" y="0"/>
+          <a:chExt cx="0" cy="0"/>
+        </a:xfrm>
+      </p:grpSpPr>
+      <p:sp>
+        <p:nvSpPr>
+          <p:cNvPr id="2" name="Slide Image Placeholder 1"/>
+          <p:cNvSpPr>
+            <a:spLocks noGrp="1" noRot="1" noChangeAspect="1"/>
+          </p:cNvSpPr>
+          <p:nvPr>
+            <p:ph type="sldImg"/>
+          </p:nvPr>
+        </p:nvSpPr>
+        <p:spPr/>
+      </p:sp>
+      <p:sp>
+        <p:nvSpPr>
+          <p:cNvPr id="3" name="Notes Placeholder 2"/>
+          <p:cNvSpPr>
+            <a:spLocks noGrp="1"/>
+          </p:cNvSpPr>
+          <p:nvPr>
+            <p:ph type="body" idx="1"/>
+          </p:nvPr>
+        </p:nvSpPr>
+        <p:spPr/>
+        <p:txBody>
+          <a:bodyPr/>
+          <a:lstStyle/>
+          <a:p>
+            <a:r>
+              <a:rPr lang="en-US" dirty="0"/>
+              <a:t>(추가 차시) 결합 판정 매트릭스: ‘황화’ 행을 가로로 읽기 — 흙 상태(젖음/적정/마름)만 바뀌어도 결론이 과습→영양·기타 의심→판단보류로 달라짐. 전체 조합표는 교안 §11.</a:t>
+            </a:r>
+          </a:p>
+          <a:p>
+            <a:r>
+              <a:rPr lang="en-US" dirty="0"/>
+              <a:t>예외도 언급: 역병·시들음병은 병해 방제가 먼저라 수분 판정보다 우선.</a:t>
+            </a:r>
+          </a:p>
+        </p:txBody>
+      </p:sp>
+      <p:sp>
+        <p:nvSpPr>
+          <p:cNvPr id="4" name="Slide Number Placeholder 3"/>
+          <p:cNvSpPr>
+            <a:spLocks noGrp="1"/>
+          </p:cNvSpPr>
+          <p:nvPr>
+            <p:ph type="sldNum" sz="quarter" idx="10"/>
+          </p:nvPr>
+        </p:nvSpPr>
+        <p:spPr/>
+        <p:txBody>
+          <a:bodyPr/>
+          <a:lstStyle/>
+          <a:p>
+            <a:fld id="{F7021451-1387-4CA6-816F-3879F97B5CBC}" type="slidenum">
+              <a:rPr lang="en-US"/>
+              <a:t>1</a:t>
+            </a:fld>
+            <a:endParaRPr lang="en-US"/>
+          </a:p>
+        </p:txBody>
+      </p:sp>
+    </p:spTree>
+  </p:cSld>
+  <p:clrMapOvr>
+    <a:masterClrMapping/>
+  </p:clrMapOvr>
+</p:notes>
+</file>
+
+<file path=ppt/notesSlides/notesSlide31.xml><?xml version="1.0" encoding="utf-8"?>
+<p:notes xmlns:a="http://schemas.openxmlformats.org/drawingml/2006/main" xmlns:r="http://schemas.openxmlformats.org/officeDocument/2006/relationships" xmlns:p="http://schemas.openxmlformats.org/presentationml/2006/main">
+  <p:cSld>
+    <p:spTree>
+      <p:nvGrpSpPr>
+        <p:cNvPr id="1" name=""/>
+        <p:cNvGrpSpPr/>
+        <p:nvPr/>
+      </p:nvGrpSpPr>
+      <p:grpSpPr>
+        <a:xfrm>
+          <a:off x="0" y="0"/>
+          <a:ext cx="0" cy="0"/>
+          <a:chOff x="0" y="0"/>
+          <a:chExt cx="0" cy="0"/>
+        </a:xfrm>
+      </p:grpSpPr>
+      <p:sp>
+        <p:nvSpPr>
+          <p:cNvPr id="2" name="Slide Image Placeholder 1"/>
+          <p:cNvSpPr>
+            <a:spLocks noGrp="1" noRot="1" noChangeAspect="1"/>
+          </p:cNvSpPr>
+          <p:nvPr>
+            <p:ph type="sldImg"/>
+          </p:nvPr>
+        </p:nvSpPr>
+        <p:spPr/>
+      </p:sp>
+      <p:sp>
+        <p:nvSpPr>
+          <p:cNvPr id="3" name="Notes Placeholder 2"/>
+          <p:cNvSpPr>
+            <a:spLocks noGrp="1"/>
+          </p:cNvSpPr>
+          <p:nvPr>
+            <p:ph type="body" idx="1"/>
+          </p:nvPr>
+        </p:nvSpPr>
+        <p:spPr/>
+        <p:txBody>
+          <a:bodyPr/>
+          <a:lstStyle/>
+          <a:p>
+            <a:r>
+              <a:rPr lang="en-US" dirty="0"/>
+              <a:t>(추가 차시) 💧 수분 상태 판정 = 정해진 조합표(규칙) — 같은 입력이면 늘 같은 답. 🌿 AI 종합 소견 = 생성형 AI가 실제 수치를 인용해 사람의 말로 쓴 소견·근거·조치.</a:t>
+            </a:r>
+          </a:p>
+          <a:p>
+            <a:r>
+              <a:rPr lang="en-US" dirty="0"/>
+              <a:t>질문거리: “두 칸이 왜 따로 있을까?” — 규칙은 설명하기 쉽지만 딱딱하고, 생성은 유연하지만 검증이 필요.</a:t>
+            </a:r>
+          </a:p>
+        </p:txBody>
+      </p:sp>
+      <p:sp>
+        <p:nvSpPr>
+          <p:cNvPr id="4" name="Slide Number Placeholder 3"/>
+          <p:cNvSpPr>
+            <a:spLocks noGrp="1"/>
+          </p:cNvSpPr>
+          <p:nvPr>
+            <p:ph type="sldNum" sz="quarter" idx="10"/>
+          </p:nvPr>
+        </p:nvSpPr>
+        <p:spPr/>
+        <p:txBody>
+          <a:bodyPr/>
+          <a:lstStyle/>
+          <a:p>
+            <a:fld id="{F7021451-1387-4CA6-816F-3879F97B5CBC}" type="slidenum">
+              <a:rPr lang="en-US"/>
+              <a:t>1</a:t>
+            </a:fld>
+            <a:endParaRPr lang="en-US"/>
+          </a:p>
+        </p:txBody>
+      </p:sp>
+    </p:spTree>
+  </p:cSld>
+  <p:clrMapOvr>
+    <a:masterClrMapping/>
+  </p:clrMapOvr>
+</p:notes>
+</file>
+
+<file path=ppt/notesSlides/notesSlide32.xml><?xml version="1.0" encoding="utf-8"?>
+<p:notes xmlns:a="http://schemas.openxmlformats.org/drawingml/2006/main" xmlns:r="http://schemas.openxmlformats.org/officeDocument/2006/relationships" xmlns:p="http://schemas.openxmlformats.org/presentationml/2006/main">
+  <p:cSld>
+    <p:spTree>
+      <p:nvGrpSpPr>
+        <p:cNvPr id="1" name=""/>
+        <p:cNvGrpSpPr/>
+        <p:nvPr/>
+      </p:nvGrpSpPr>
+      <p:grpSpPr>
+        <a:xfrm>
+          <a:off x="0" y="0"/>
+          <a:ext cx="0" cy="0"/>
+          <a:chOff x="0" y="0"/>
+          <a:chExt cx="0" cy="0"/>
+        </a:xfrm>
+      </p:grpSpPr>
+      <p:sp>
+        <p:nvSpPr>
+          <p:cNvPr id="2" name="Slide Image Placeholder 1"/>
+          <p:cNvSpPr>
+            <a:spLocks noGrp="1" noRot="1" noChangeAspect="1"/>
+          </p:cNvSpPr>
+          <p:nvPr>
+            <p:ph type="sldImg"/>
+          </p:nvPr>
+        </p:nvSpPr>
+        <p:spPr/>
+      </p:sp>
+      <p:sp>
+        <p:nvSpPr>
+          <p:cNvPr id="3" name="Notes Placeholder 2"/>
+          <p:cNvSpPr>
+            <a:spLocks noGrp="1"/>
+          </p:cNvSpPr>
+          <p:nvPr>
+            <p:ph type="body" idx="1"/>
+          </p:nvPr>
+        </p:nvSpPr>
+        <p:spPr/>
+        <p:txBody>
+          <a:bodyPr/>
+          <a:lstStyle/>
+          <a:p>
+            <a:r>
+              <a:rPr lang="en-US" dirty="0"/>
+              <a:t>(추가 차시) AI 신뢰 규칙(가드레일) 3가지: 모르면 판단보류 / 없는 값은 지어내지 않기(환각 방지) / 오래된 센서값은 밝히기(실제 앱 기준: 마지막 측정 후 10분 지나면 ‘오래된 값’ 표시).</a:t>
+            </a:r>
+          </a:p>
+          <a:p>
+            <a:r>
+              <a:rPr lang="en-US" dirty="0"/>
+              <a:t>오늘은 “AI를 믿을 수 있게 만드는 규칙도 사람이 정한다” 한 문장으로 예고만 하고 퀴즈로 전환.</a:t>
+            </a:r>
+          </a:p>
+        </p:txBody>
+      </p:sp>
+      <p:sp>
+        <p:nvSpPr>
+          <p:cNvPr id="4" name="Slide Number Placeholder 3"/>
+          <p:cNvSpPr>
+            <a:spLocks noGrp="1"/>
+          </p:cNvSpPr>
+          <p:nvPr>
+            <p:ph type="sldNum" sz="quarter" idx="10"/>
+          </p:nvPr>
+        </p:nvSpPr>
+        <p:spPr/>
+        <p:txBody>
+          <a:bodyPr/>
+          <a:lstStyle/>
+          <a:p>
+            <a:fld id="{F7021451-1387-4CA6-816F-3879F97B5CBC}" type="slidenum">
+              <a:rPr lang="en-US"/>
+              <a:t>1</a:t>
+            </a:fld>
+            <a:endParaRPr lang="en-US"/>
+          </a:p>
+        </p:txBody>
+      </p:sp>
+    </p:spTree>
+  </p:cSld>
+  <p:clrMapOvr>
+    <a:masterClrMapping/>
+  </p:clrMapOvr>
+</p:notes>
+</file>
+
+<file path=ppt/notesSlides/notesSlide33.xml><?xml version="1.0" encoding="utf-8"?>
+<p:notes xmlns:a="http://schemas.openxmlformats.org/drawingml/2006/main" xmlns:r="http://schemas.openxmlformats.org/officeDocument/2006/relationships" xmlns:p="http://schemas.openxmlformats.org/presentationml/2006/main">
+  <p:cSld>
+    <p:spTree>
+      <p:nvGrpSpPr>
+        <p:cNvPr id="1" name=""/>
+        <p:cNvGrpSpPr/>
+        <p:nvPr/>
+      </p:nvGrpSpPr>
+      <p:grpSpPr>
+        <a:xfrm>
+          <a:off x="0" y="0"/>
+          <a:ext cx="0" cy="0"/>
+          <a:chOff x="0" y="0"/>
+          <a:chExt cx="0" cy="0"/>
+        </a:xfrm>
+      </p:grpSpPr>
+      <p:sp>
+        <p:nvSpPr>
+          <p:cNvPr id="2" name="Slide Image Placeholder 1"/>
+          <p:cNvSpPr>
+            <a:spLocks noGrp="1" noRot="1" noChangeAspect="1"/>
+          </p:cNvSpPr>
+          <p:nvPr>
+            <p:ph type="sldImg"/>
+          </p:nvPr>
+        </p:nvSpPr>
+        <p:spPr/>
+      </p:sp>
+      <p:sp>
+        <p:nvSpPr>
+          <p:cNvPr id="3" name="Notes Placeholder 2"/>
+          <p:cNvSpPr>
+            <a:spLocks noGrp="1"/>
+          </p:cNvSpPr>
+          <p:nvPr>
+            <p:ph type="body" idx="1"/>
+          </p:nvPr>
+        </p:nvSpPr>
+        <p:spPr/>
+        <p:txBody>
+          <a:bodyPr/>
+          <a:lstStyle/>
+          <a:p>
+            <a:r>
+              <a:rPr lang="en-US" dirty="0"/>
+              <a:t>⏱ 2분. 질문: “가장 신기했던 스테이션과 그 이유는?” — 발표는 1명만 듣기.</a:t>
+            </a:r>
+          </a:p>
+          <a:p>
+            <a:r>
+              <a:rPr lang="en-US" dirty="0"/>
+              <a:t>나머지 전원은 활동지 B의 ‘오늘 한 줄 소감’ 칸을 채우게 할 것.</a:t>
+            </a:r>
+          </a:p>
+        </p:txBody>
+      </p:sp>
+      <p:sp>
+        <p:nvSpPr>
+          <p:cNvPr id="4" name="Slide Number Placeholder 3"/>
+          <p:cNvSpPr>
+            <a:spLocks noGrp="1"/>
+          </p:cNvSpPr>
+          <p:nvPr>
+            <p:ph type="sldNum" sz="quarter" idx="10"/>
+          </p:nvPr>
+        </p:nvSpPr>
+        <p:spPr/>
+        <p:txBody>
+          <a:bodyPr/>
+          <a:lstStyle/>
+          <a:p>
+            <a:fld id="{F7021451-1387-4CA6-816F-3879F97B5CBC}" type="slidenum">
+              <a:rPr lang="en-US"/>
+              <a:t>1</a:t>
+            </a:fld>
+            <a:endParaRPr lang="en-US"/>
+          </a:p>
+        </p:txBody>
+      </p:sp>
+    </p:spTree>
   </p:cSld>
   <p:clrMapOvr>
     <a:masterClrMapping/>
@@ -2014,7 +2999,22 @@
           <a:bodyPr/>
           <a:lstStyle/>
           <a:p>
-            <a:endParaRPr lang="en-US" dirty="0"/>
+            <a:r>
+              <a:rPr lang="en-US" dirty="0"/>
+              <a:t>▶ 멘트: “STEP을 하나 통과할 때마다 내 앱의 잠긴 기능이 하나씩 켜지고, 4/4가 되면 나만의 스마트팜 앱이 완성됩니다.”</a:t>
+            </a:r>
+          </a:p>
+          <a:p>
+            <a:r>
+              <a:rPr lang="en-US" dirty="0"/>
+              <a:t>👀 방 번호(1~15)는 좌석 배정표대로. 다른 PC면 같은 방을 골라도 데이터 충돌은 없지만 혼동 방지를 위해 배정표대로 안내.</a:t>
+            </a:r>
+          </a:p>
+          <a:p>
+            <a:r>
+              <a:rPr lang="en-US" dirty="0"/>
+              <a:t>⏱ 도입은 10:00까지. 전환: “그럼 접속해 봅시다” → 접속 안내 슬라이드.</a:t>
+            </a:r>
           </a:p>
         </p:txBody>
       </p:sp>
@@ -2103,6 +3103,30 @@
               <a:t>방 번호 배정표대로. 이전 기록이 남아 있으면 초기화 먼저.</a:t>
             </a:r>
           </a:p>
+          <a:p>
+            <a:r>
+              <a:rPr lang="en-US" dirty="0"/>
+              <a:t>⏱ 접속 5분. 초기화는 학생 각자 자기 PC에서 — 데이터가 각 PC 브라우저(localStorage)에 저장되므로 교사 PC에서 눌러도 학생 PC는 초기화되지 않음. 초기화하면 저장된 인증키도 함께 삭제되어 STEP 1이 잠김부터 다시 시작.</a:t>
+            </a:r>
+          </a:p>
+          <a:p>
+            <a:r>
+              <a:rPr lang="en-US" dirty="0"/>
+              <a:t>이때 견본 인증키를 칠판에 공유: 공백 없이 16자 이상이면 통과 — 예: SEOULRAIM2026DEMOKEY. 학생 각자 발급은 수업 중 불가(원하면 사전 과제).</a:t>
+            </a:r>
+          </a:p>
+          <a:p>
+            <a:r>
+              <a:rPr lang="en-US" dirty="0"/>
+              <a:t>👀 관전 포인트를 소리 내어 읽어주기: 버튼을 누를 때마다 하단 ‘가상 Supabase’에 데이터가 한 줄씩 쌓인다.</a:t>
+            </a:r>
+          </a:p>
+          <a:p>
+            <a:r>
+              <a:rPr lang="en-US" dirty="0"/>
+              <a:t>전환: 전원 접속·초기화 확인 후 STEP 1 표지로.</a:t>
+            </a:r>
+          </a:p>
         </p:txBody>
       </p:sp>
       <p:sp>
@@ -2185,7 +3209,16 @@
           <a:bodyPr/>
           <a:lstStyle/>
           <a:p>
-            <a:endParaRPr lang="en-US" dirty="0"/>
+            <a:r>
+              <a:rPr lang="en-US" dirty="0"/>
+              <a:t>⏱ STEP 1 — 15분(10:00~25:00). 목표: 인증키를 붙여넣어 잠긴 날씨 기능을 열고, 기상청 초단기실황으로 내 위치의 진짜 날씨를 받아온다.</a:t>
+            </a:r>
+          </a:p>
+          <a:p>
+            <a:r>
+              <a:rPr lang="en-US" dirty="0"/>
+              <a:t>⚠ 주의: ‘실제 호출은 서버에 숨긴 키가 한다’는 연출 원리는 마무리 ‘오늘의 비밀 공개’ 전까지 절대 언급 금지.</a:t>
+            </a:r>
           </a:p>
         </p:txBody>
       </p:sp>
@@ -2274,6 +3307,24 @@
               <a:t>이번 STEP은 시뮬레이션이 아니라 실제 기상청 날씨를 받아온다는 점을 강조.</a:t>
             </a:r>
           </a:p>
+          <a:p>
+            <a:r>
+              <a:rPr lang="en-US" dirty="0"/>
+              <a:t>👀 짚기: 인증키는 비밀번호처럼 — 실제 개발 현장 보안 사고의 단골이 ‘코드나 GitHub에 키를 그대로 올리는 것’. 오늘 견본 키를 다 같이 쓰는 것은 수업용 특례라는 점도 언급.</a:t>
+            </a:r>
+          </a:p>
+          <a:p>
+            <a:r>
+              <a:rPr lang="en-US" dirty="0"/>
+              <a:t>Q. “인증키를 친구에게 알려줘도 돼요?” → A. 안 됩니다. 남이 내 이름으로 서버를 호출할 수 있어요.</a:t>
+            </a:r>
+          </a:p>
+          <a:p>
+            <a:r>
+              <a:rPr lang="en-US" dirty="0"/>
+              <a:t>전환: “그 열쇠를 직접 넣어봅시다” → 다음 슬라이드(조작).</a:t>
+            </a:r>
+          </a:p>
         </p:txBody>
       </p:sp>
       <p:sp>
@@ -2356,7 +3407,34 @@
           <a:bodyPr/>
           <a:lstStyle/>
           <a:p>
-            <a:endParaRPr lang="en-US" dirty="0"/>
+            <a:r>
+              <a:rPr lang="en-US" dirty="0"/>
+              <a:t>▶ 멘트: “인증이 곧 문을 여는 열쇠 — 넣기 전과 후를 꼭 비교하세요.”</a:t>
+            </a:r>
+          </a:p>
+          <a:p>
+            <a:r>
+              <a:rPr lang="en-US" dirty="0"/>
+              <a:t>👀 하이라이트: 잠김→켜짐 전환. 저장 전 ‘내 위치 날씨 가져오기’ 버튼이 회색으로 죽어 있는 것을 먼저 보여주고, ‘인증키 저장’ 클릭 약 1초 뒤 날씨 카드가 살아나는 순간을 다 같이 확인.</a:t>
+            </a:r>
+          </a:p>
+          <a:p>
+            <a:r>
+              <a:rPr lang="en-US" dirty="0"/>
+              <a:t>견본 키는 교사가 칠판에 적어 공유(공백 없이 16자 이상). 방별 저장이라 새로고침 후 재입력 불필요.</a:t>
+            </a:r>
+          </a:p>
+          <a:p>
+            <a:r>
+              <a:rPr lang="en-US" dirty="0"/>
+              <a:t>⚠ “아무 글자나 넣어도 되던데요?”라는 학생에겐 “그건 마무리에 공개할 오늘의 비밀”이라고만 답할 것.</a:t>
+            </a:r>
+          </a:p>
+          <a:p>
+            <a:r>
+              <a:rPr lang="en-US" dirty="0"/>
+              <a:t>전환: 켜진 버튼으로 진짜 날씨를 가져와 봅시다 → 다음 슬라이드.</a:t>
+            </a:r>
           </a:p>
         </p:txBody>
       </p:sp>
@@ -2443,6 +3521,24 @@
             <a:r>
               <a:rPr lang="en-US" dirty="0"/>
               <a:t>위치 권한 거부돼도 지역 버튼으로 실제 호출 가능.</a:t>
+            </a:r>
+          </a:p>
+          <a:p>
+            <a:r>
+              <a:rPr lang="en-US" dirty="0"/>
+              <a:t>카드 ③에 오류 문구와 ‘체험 모드로 진행’ 버튼이 뜨면 학생 키 문제가 아니라 서버 키(KMA_SERVICE_KEY) 미설정·기상청/네트워크 장애 신호 — 교사가 점검하고, 급하면 체험 모드로 수업 계속.</a:t>
+            </a:r>
+          </a:p>
+          <a:p>
+            <a:r>
+              <a:rPr lang="en-US" dirty="0"/>
+              <a:t>여기까지 되면 진행도 1/4. Q. “진짜 오늘 날씨예요?” → A. 네, 기상청 초단기실황 — 방금 관측된 실제 값입니다(매시간 갱신).</a:t>
+            </a:r>
+          </a:p>
+          <a:p>
+            <a:r>
+              <a:rPr lang="en-US" dirty="0"/>
+              <a:t>전환: “화면의 숫자, 그냥 지나치지 마세요” → 관찰 포인트 슬라이드.</a:t>
             </a:r>
           </a:p>
         </p:txBody>
